--- a/docs/slides/pptx/08-ntl-what-darkness-tells-us-fr.pptx
+++ b/docs/slides/pptx/08-ntl-what-darkness-tells-us-fr.pptx
@@ -24,6 +24,9 @@
     <p:sldId id="272" r:id="rId23"/>
     <p:sldId id="273" r:id="rId24"/>
     <p:sldId id="274" r:id="rId25"/>
+    <p:sldId id="275" r:id="rId26"/>
+    <p:sldId id="276" r:id="rId27"/>
+    <p:sldId id="277" r:id="rId28"/>
   </p:sldIdLst>
   <p:sldSz cx="12191695" cy="6858000" type="screen4x3"/>
   <p:notesSz cx="6858000" cy="9144000"/>
@@ -3317,17 +3320,18 @@
         <p:spPr>
           <a:xfrm>
             <a:off x="0" y="0"/>
-            <a:ext cx="12191695" cy="60000"/>
+            <a:ext cx="12191695" cy="6858000"/>
           </a:xfrm>
           <a:prstGeom prst="rect">
             <a:avLst/>
           </a:prstGeom>
           <a:solidFill>
-            <a:srgbClr val="F2A900"/>
+            <a:srgbClr val="0B2545"/>
           </a:solidFill>
           <a:ln>
             <a:noFill/>
           </a:ln>
+          <a:effectLst/>
         </p:spPr>
         <p:style>
           <a:lnRef idx="1">
@@ -3360,7 +3364,7 @@
         <p:spPr>
           <a:xfrm>
             <a:off x="731520" y="502920"/>
-            <a:ext cx="10728655" cy="914400"/>
+            <a:ext cx="10728655" cy="320040"/>
           </a:xfrm>
           <a:prstGeom prst="rect">
             <a:avLst/>
@@ -3375,13 +3379,13 @@
           <a:p>
             <a:pPr algn="l"/>
             <a:r>
-              <a:rPr sz="2800" b="1">
-                <a:solidFill>
-                  <a:srgbClr val="0B2545"/>
-                </a:solidFill>
-                <a:latin typeface="Segoe UI"/>
-              </a:rPr>
-              <a:t>Trois nombres, trois questions différentes</a:t>
+              <a:rPr sz="1100" b="1">
+                <a:solidFill>
+                  <a:srgbClr val="F2A900"/>
+                </a:solidFill>
+                <a:latin typeface="Segoe UI"/>
+              </a:rPr>
+              <a:t>PARTIE 2</a:t>
             </a:r>
           </a:p>
         </p:txBody>
@@ -3394,8 +3398,8 @@
         </p:nvSpPr>
         <p:spPr>
           <a:xfrm>
-            <a:off x="731520" y="1371600"/>
-            <a:ext cx="10728655" cy="548640"/>
+            <a:off x="731520" y="914400"/>
+            <a:ext cx="10728655" cy="914400"/>
           </a:xfrm>
           <a:prstGeom prst="rect">
             <a:avLst/>
@@ -3410,13 +3414,13 @@
           <a:p>
             <a:pPr algn="l"/>
             <a:r>
-              <a:rPr sz="1400" b="0">
-                <a:solidFill>
-                  <a:srgbClr val="33403A"/>
-                </a:solidFill>
-                <a:latin typeface="Segoe UI"/>
-              </a:rPr>
-              <a:t>Radiance totale sur une zone.</a:t>
+              <a:rPr sz="2800" b="1">
+                <a:solidFill>
+                  <a:srgbClr val="FFFFFF"/>
+                </a:solidFill>
+                <a:latin typeface="Segoe UI"/>
+              </a:rPr>
+              <a:t>De la radiance à un indicateur</a:t>
             </a:r>
           </a:p>
         </p:txBody>
@@ -3429,7 +3433,7 @@
         </p:nvSpPr>
         <p:spPr>
           <a:xfrm>
-            <a:off x="731520" y="1874520"/>
+            <a:off x="731520" y="1783080"/>
             <a:ext cx="10728655" cy="548640"/>
           </a:xfrm>
           <a:prstGeom prst="rect">
@@ -3447,13 +3451,11 @@
             <a:r>
               <a:rPr sz="1400" b="0">
                 <a:solidFill>
-                  <a:srgbClr val="33403A"/>
-                </a:solidFill>
-                <a:latin typeface="Segoe UI"/>
-              </a:rPr>
-              <a:t>Répond à :  quelle quantité
-d'activité éclairée ?  Croît quand les lieux existants s'éclairent
- et  quand de nouveaux lieux s'allument. Dominée par les villes.</a:t>
+                  <a:srgbClr val="DBE7E0"/>
+                </a:solidFill>
+                <a:latin typeface="Segoe UI"/>
+              </a:rPr>
+              <a:t>Les cinq étapes que vous exécuterez ce matin et cet après-midi.</a:t>
             </a:r>
           </a:p>
         </p:txBody>
@@ -3461,156 +3463,6 @@
       <p:sp>
         <p:nvSpPr>
           <p:cNvPr id="6" name="TextBox 5"/>
-          <p:cNvSpPr txBox="1"/>
-          <p:nvPr/>
-        </p:nvSpPr>
-        <p:spPr>
-          <a:xfrm>
-            <a:off x="731520" y="2377440"/>
-            <a:ext cx="10728655" cy="548640"/>
-          </a:xfrm>
-          <a:prstGeom prst="rect">
-            <a:avLst/>
-          </a:prstGeom>
-          <a:noFill/>
-        </p:spPr>
-        <p:txBody>
-          <a:bodyPr wrap="square">
-            <a:spAutoFit/>
-          </a:bodyPr>
-          <a:lstStyle/>
-          <a:p>
-            <a:pPr algn="l"/>
-            <a:r>
-              <a:rPr sz="1400" b="0">
-                <a:solidFill>
-                  <a:srgbClr val="33403A"/>
-                </a:solidFill>
-                <a:latin typeface="Segoe UI"/>
-              </a:rPr>
-              <a:t>Part du territoire au-dessus d'un seuil.</a:t>
-            </a:r>
-          </a:p>
-        </p:txBody>
-      </p:sp>
-      <p:sp>
-        <p:nvSpPr>
-          <p:cNvPr id="7" name="Rectangle 6"/>
-          <p:cNvSpPr/>
-          <p:nvPr/>
-        </p:nvSpPr>
-        <p:spPr>
-          <a:xfrm>
-            <a:off x="731520" y="2880360"/>
-            <a:ext cx="10728655" cy="960120"/>
-          </a:xfrm>
-          <a:prstGeom prst="rect">
-            <a:avLst/>
-          </a:prstGeom>
-          <a:solidFill>
-            <a:srgbClr val="F4F8F5"/>
-          </a:solidFill>
-          <a:ln>
-            <a:solidFill>
-              <a:srgbClr val="1B7A43"/>
-            </a:solidFill>
-          </a:ln>
-          <a:effectLst/>
-        </p:spPr>
-        <p:style>
-          <a:lnRef idx="1">
-            <a:schemeClr val="accent1"/>
-          </a:lnRef>
-          <a:fillRef idx="3">
-            <a:schemeClr val="accent1"/>
-          </a:fillRef>
-          <a:effectRef idx="2">
-            <a:schemeClr val="accent1"/>
-          </a:effectRef>
-          <a:fontRef idx="minor">
-            <a:schemeClr val="lt1"/>
-          </a:fontRef>
-        </p:style>
-        <p:txBody>
-          <a:bodyPr rtlCol="0" anchor="ctr" wrap="square"/>
-          <a:lstStyle/>
-          <a:p>
-            <a:pPr algn="ctr"/>
-            <a:r>
-              <a:rPr sz="1200">
-                <a:solidFill>
-                  <a:srgbClr val="33403A"/>
-                </a:solidFill>
-                <a:latin typeface="Segoe UI"/>
-              </a:rPr>
-              <a:t>POURQUOI LES TROIS — Un pays peut afficher une Somme des lumières en hausse tandis que sa superficie
-éclairée stagne et que son inégalité s'aggrave — c'est-à-dire que la capitale a
-grandi et le reste non. Un seul nombre masque cela. Trois nombres le montrent, et
-le troisième est celui qui change l'endroit où l'on placerait un investissement.</a:t>
-            </a:r>
-          </a:p>
-        </p:txBody>
-      </p:sp>
-      <p:sp>
-        <p:nvSpPr>
-          <p:cNvPr id="8" name="Rectangle 7"/>
-          <p:cNvSpPr/>
-          <p:nvPr/>
-        </p:nvSpPr>
-        <p:spPr>
-          <a:xfrm>
-            <a:off x="731520" y="3977640"/>
-            <a:ext cx="10728655" cy="960120"/>
-          </a:xfrm>
-          <a:prstGeom prst="rect">
-            <a:avLst/>
-          </a:prstGeom>
-          <a:solidFill>
-            <a:srgbClr val="F4F8F5"/>
-          </a:solidFill>
-          <a:ln>
-            <a:solidFill>
-              <a:srgbClr val="1B7A43"/>
-            </a:solidFill>
-          </a:ln>
-          <a:effectLst/>
-        </p:spPr>
-        <p:style>
-          <a:lnRef idx="1">
-            <a:schemeClr val="accent1"/>
-          </a:lnRef>
-          <a:fillRef idx="3">
-            <a:schemeClr val="accent1"/>
-          </a:fillRef>
-          <a:effectRef idx="2">
-            <a:schemeClr val="accent1"/>
-          </a:effectRef>
-          <a:fontRef idx="minor">
-            <a:schemeClr val="lt1"/>
-          </a:fontRef>
-        </p:style>
-        <p:txBody>
-          <a:bodyPr rtlCol="0" anchor="ctr" wrap="square"/>
-          <a:lstStyle/>
-          <a:p>
-            <a:pPr algn="ctr"/>
-            <a:r>
-              <a:rPr sz="1200">
-                <a:solidFill>
-                  <a:srgbClr val="33403A"/>
-                </a:solidFill>
-                <a:latin typeface="Segoe UI"/>
-              </a:rPr>
-              <a:t>LE SEUIL EST UNE DÉCISION, PAS UN FAIT — La « superficie éclairée » bouge quand on bouge le seuil. À 0,1 nW·cm⁻²·sr⁻¹ un
-pays peut être éclairé à 40 % ; à 5,0, à 6 %.  Publiez le seuil à côté du
-nombre, systématiquement.</a:t>
-            </a:r>
-          </a:p>
-        </p:txBody>
-      </p:sp>
-      <p:sp>
-        <p:nvSpPr>
-          <p:cNvPr id="9" name="TextBox 8"/>
           <p:cNvSpPr txBox="1"/>
           <p:nvPr/>
         </p:nvSpPr>
@@ -3670,18 +3522,17 @@
         <p:spPr>
           <a:xfrm>
             <a:off x="0" y="0"/>
-            <a:ext cx="12191695" cy="6858000"/>
+            <a:ext cx="12191695" cy="60000"/>
           </a:xfrm>
           <a:prstGeom prst="rect">
             <a:avLst/>
           </a:prstGeom>
           <a:solidFill>
-            <a:srgbClr val="0B2545"/>
+            <a:srgbClr val="F2A900"/>
           </a:solidFill>
           <a:ln>
             <a:noFill/>
           </a:ln>
-          <a:effectLst/>
         </p:spPr>
         <p:style>
           <a:lnRef idx="1">
@@ -3714,7 +3565,7 @@
         <p:spPr>
           <a:xfrm>
             <a:off x="731520" y="502920"/>
-            <a:ext cx="10728655" cy="320040"/>
+            <a:ext cx="10728655" cy="914400"/>
           </a:xfrm>
           <a:prstGeom prst="rect">
             <a:avLst/>
@@ -3729,13 +3580,13 @@
           <a:p>
             <a:pPr algn="l"/>
             <a:r>
-              <a:rPr sz="1100" b="1">
-                <a:solidFill>
-                  <a:srgbClr val="F2A900"/>
-                </a:solidFill>
-                <a:latin typeface="Segoe UI"/>
-              </a:rPr>
-              <a:t>PARTIE 3</a:t>
+              <a:rPr sz="2800" b="1">
+                <a:solidFill>
+                  <a:srgbClr val="0B2545"/>
+                </a:solidFill>
+                <a:latin typeface="Segoe UI"/>
+              </a:rPr>
+              <a:t>La chaîne, de bout en bout</a:t>
             </a:r>
           </a:p>
         </p:txBody>
@@ -3748,8 +3599,8 @@
         </p:nvSpPr>
         <p:spPr>
           <a:xfrm>
-            <a:off x="731520" y="914400"/>
-            <a:ext cx="10728655" cy="914400"/>
+            <a:off x="731520" y="1371600"/>
+            <a:ext cx="10728655" cy="640080"/>
           </a:xfrm>
           <a:prstGeom prst="rect">
             <a:avLst/>
@@ -3764,13 +3615,13 @@
           <a:p>
             <a:pPr algn="l"/>
             <a:r>
-              <a:rPr sz="2800" b="1">
-                <a:solidFill>
-                  <a:srgbClr val="FFFFFF"/>
-                </a:solidFill>
-                <a:latin typeface="Segoe UI"/>
-              </a:rPr>
-              <a:t>Les six artefacts</a:t>
+              <a:rPr sz="1100" b="0">
+                <a:solidFill>
+                  <a:srgbClr val="6B7B75"/>
+                </a:solidFill>
+                <a:latin typeface="Segoe UI"/>
+              </a:rPr>
+              <a:t>FIGURE — capturez la diapositive 11 du deck HTML et collez-la ici.  (L'étape 5 n'est pas une formalité. C'est elle qui décide si votre pays peut diffuser ceci.)</a:t>
             </a:r>
           </a:p>
         </p:txBody>
@@ -3778,41 +3629,6 @@
       <p:sp>
         <p:nvSpPr>
           <p:cNvPr id="5" name="TextBox 4"/>
-          <p:cNvSpPr txBox="1"/>
-          <p:nvPr/>
-        </p:nvSpPr>
-        <p:spPr>
-          <a:xfrm>
-            <a:off x="731520" y="1783080"/>
-            <a:ext cx="10728655" cy="548640"/>
-          </a:xfrm>
-          <a:prstGeom prst="rect">
-            <a:avLst/>
-          </a:prstGeom>
-          <a:noFill/>
-        </p:spPr>
-        <p:txBody>
-          <a:bodyPr wrap="square">
-            <a:spAutoFit/>
-          </a:bodyPr>
-          <a:lstStyle/>
-          <a:p>
-            <a:pPr algn="l"/>
-            <a:r>
-              <a:rPr sz="1400" b="0">
-                <a:solidFill>
-                  <a:srgbClr val="DBE7E0"/>
-                </a:solidFill>
-                <a:latin typeface="Segoe UI"/>
-              </a:rPr>
-              <a:t>Nommés ici. Rencontrés concrètement à 10h30, dans le raster de votre pays.</a:t>
-            </a:r>
-          </a:p>
-        </p:txBody>
-      </p:sp>
-      <p:sp>
-        <p:nvSpPr>
-          <p:cNvPr id="6" name="TextBox 5"/>
           <p:cNvSpPr txBox="1"/>
           <p:nvPr/>
         </p:nvSpPr>
@@ -3872,18 +3688,17 @@
         <p:spPr>
           <a:xfrm>
             <a:off x="0" y="0"/>
-            <a:ext cx="12191695" cy="6858000"/>
+            <a:ext cx="12191695" cy="60000"/>
           </a:xfrm>
           <a:prstGeom prst="rect">
             <a:avLst/>
           </a:prstGeom>
           <a:solidFill>
-            <a:srgbClr val="08090F"/>
+            <a:srgbClr val="F2A900"/>
           </a:solidFill>
           <a:ln>
             <a:noFill/>
           </a:ln>
-          <a:effectLst/>
         </p:spPr>
         <p:style>
           <a:lnRef idx="1">
@@ -3933,24 +3748,130 @@
             <a:r>
               <a:rPr sz="2800" b="1">
                 <a:solidFill>
-                  <a:srgbClr val="FFFFFF"/>
-                </a:solidFill>
-                <a:latin typeface="Segoe UI"/>
-              </a:rPr>
-              <a:t>Ce que le capteur voit et que vous n'avez pas demandé</a:t>
-            </a:r>
-          </a:p>
-        </p:txBody>
-      </p:sp>
-      <p:sp>
-        <p:nvSpPr>
-          <p:cNvPr id="4" name="Rectangle 3"/>
+                  <a:srgbClr val="0B2545"/>
+                </a:solidFill>
+                <a:latin typeface="Segoe UI"/>
+              </a:rPr>
+              <a:t>Trois nombres, trois questions différentes</a:t>
+            </a:r>
+          </a:p>
+        </p:txBody>
+      </p:sp>
+      <p:sp>
+        <p:nvSpPr>
+          <p:cNvPr id="4" name="TextBox 3"/>
+          <p:cNvSpPr txBox="1"/>
+          <p:nvPr/>
+        </p:nvSpPr>
+        <p:spPr>
+          <a:xfrm>
+            <a:off x="731520" y="1371600"/>
+            <a:ext cx="10728655" cy="548640"/>
+          </a:xfrm>
+          <a:prstGeom prst="rect">
+            <a:avLst/>
+          </a:prstGeom>
+          <a:noFill/>
+        </p:spPr>
+        <p:txBody>
+          <a:bodyPr wrap="square">
+            <a:spAutoFit/>
+          </a:bodyPr>
+          <a:lstStyle/>
+          <a:p>
+            <a:pPr algn="l"/>
+            <a:r>
+              <a:rPr sz="1400" b="0">
+                <a:solidFill>
+                  <a:srgbClr val="33403A"/>
+                </a:solidFill>
+                <a:latin typeface="Segoe UI"/>
+              </a:rPr>
+              <a:t>Radiance totale sur une zone.</a:t>
+            </a:r>
+          </a:p>
+        </p:txBody>
+      </p:sp>
+      <p:sp>
+        <p:nvSpPr>
+          <p:cNvPr id="5" name="TextBox 4"/>
+          <p:cNvSpPr txBox="1"/>
+          <p:nvPr/>
+        </p:nvSpPr>
+        <p:spPr>
+          <a:xfrm>
+            <a:off x="731520" y="1874520"/>
+            <a:ext cx="10728655" cy="548640"/>
+          </a:xfrm>
+          <a:prstGeom prst="rect">
+            <a:avLst/>
+          </a:prstGeom>
+          <a:noFill/>
+        </p:spPr>
+        <p:txBody>
+          <a:bodyPr wrap="square">
+            <a:spAutoFit/>
+          </a:bodyPr>
+          <a:lstStyle/>
+          <a:p>
+            <a:pPr algn="l"/>
+            <a:r>
+              <a:rPr sz="1400" b="0">
+                <a:solidFill>
+                  <a:srgbClr val="33403A"/>
+                </a:solidFill>
+                <a:latin typeface="Segoe UI"/>
+              </a:rPr>
+              <a:t>Quelle quantité d'activité
+éclairée ?  Dominée par les villes.</a:t>
+            </a:r>
+          </a:p>
+        </p:txBody>
+      </p:sp>
+      <p:sp>
+        <p:nvSpPr>
+          <p:cNvPr id="6" name="TextBox 5"/>
+          <p:cNvSpPr txBox="1"/>
+          <p:nvPr/>
+        </p:nvSpPr>
+        <p:spPr>
+          <a:xfrm>
+            <a:off x="731520" y="2377440"/>
+            <a:ext cx="10728655" cy="548640"/>
+          </a:xfrm>
+          <a:prstGeom prst="rect">
+            <a:avLst/>
+          </a:prstGeom>
+          <a:noFill/>
+        </p:spPr>
+        <p:txBody>
+          <a:bodyPr wrap="square">
+            <a:spAutoFit/>
+          </a:bodyPr>
+          <a:lstStyle/>
+          <a:p>
+            <a:pPr algn="l"/>
+            <a:r>
+              <a:rPr sz="1400" b="0">
+                <a:solidFill>
+                  <a:srgbClr val="33403A"/>
+                </a:solidFill>
+                <a:latin typeface="Segoe UI"/>
+              </a:rPr>
+              <a:t>Part du territoire au-dessus d'un seuil.</a:t>
+            </a:r>
+          </a:p>
+        </p:txBody>
+      </p:sp>
+      <p:sp>
+        <p:nvSpPr>
+          <p:cNvPr id="7" name="Rectangle 6"/>
           <p:cNvSpPr/>
           <p:nvPr/>
         </p:nvSpPr>
         <p:spPr>
           <a:xfrm>
-            <a:off x="731520" y="1371600"/>
+            <a:off x="731520" y="2880360"/>
             <a:ext cx="10728655" cy="960120"/>
           </a:xfrm>
           <a:prstGeom prst="rect">
@@ -3992,51 +3913,15 @@
                 </a:solidFill>
                 <a:latin typeface="Segoe UI"/>
               </a:rPr>
-              <a:t>PLUS DEUX QUE VOUS NE VERREZ PAS AUJOURD'HUI — Saisonnalité  — nuages, aérosols, clair de lune et poussière
-d'harmattan déplacent les séries mensuelles ; les composites annuels le masquent.
- Discontinuité de capteur  — le raccord DMSP/VIIRS, vu plus haut.</a:t>
-            </a:r>
-          </a:p>
-        </p:txBody>
-      </p:sp>
-      <p:sp>
-        <p:nvSpPr>
-          <p:cNvPr id="5" name="TextBox 4"/>
-          <p:cNvSpPr txBox="1"/>
-          <p:nvPr/>
-        </p:nvSpPr>
-        <p:spPr>
-          <a:xfrm>
-            <a:off x="731520" y="2468880"/>
-            <a:ext cx="10728655" cy="640080"/>
-          </a:xfrm>
-          <a:prstGeom prst="rect">
-            <a:avLst/>
-          </a:prstGeom>
-          <a:noFill/>
-        </p:spPr>
-        <p:txBody>
-          <a:bodyPr wrap="square">
-            <a:spAutoFit/>
-          </a:bodyPr>
-          <a:lstStyle/>
-          <a:p>
-            <a:pPr algn="l"/>
-            <a:r>
-              <a:rPr sz="1100" b="0">
-                <a:solidFill>
-                  <a:srgbClr val="6B7B75"/>
-                </a:solidFill>
-                <a:latin typeface="Segoe UI"/>
-              </a:rPr>
-              <a:t>FIGURE — capturez la diapositive 12 du deck HTML et collez-la ici.</a:t>
-            </a:r>
-          </a:p>
-        </p:txBody>
-      </p:sp>
-      <p:sp>
-        <p:nvSpPr>
-          <p:cNvPr id="6" name="TextBox 5"/>
+              <a:t>CALCULEZ LES TROIS, TOUJOURS — Elles peuvent évoluer en sens opposés dans le même pays, la même année — et cette
+divergence  est  le résultat.</a:t>
+            </a:r>
+          </a:p>
+        </p:txBody>
+      </p:sp>
+      <p:sp>
+        <p:nvSpPr>
+          <p:cNvPr id="8" name="TextBox 7"/>
           <p:cNvSpPr txBox="1"/>
           <p:nvPr/>
         </p:nvSpPr>
@@ -4139,7 +4024,7 @@
         <p:spPr>
           <a:xfrm>
             <a:off x="731520" y="502920"/>
-            <a:ext cx="10728655" cy="914400"/>
+            <a:ext cx="10728655" cy="320040"/>
           </a:xfrm>
           <a:prstGeom prst="rect">
             <a:avLst/>
@@ -4154,26 +4039,62 @@
           <a:p>
             <a:pPr algn="l"/>
             <a:r>
-              <a:rPr sz="2800" b="1">
-                <a:solidFill>
-                  <a:srgbClr val="0B2545"/>
-                </a:solidFill>
-                <a:latin typeface="Segoe UI"/>
-              </a:rPr>
-              <a:t>Trois façons dont une étude de lumières nocturnes se trompe</a:t>
-            </a:r>
-          </a:p>
-        </p:txBody>
-      </p:sp>
-      <p:sp>
-        <p:nvSpPr>
-          <p:cNvPr id="4" name="Rectangle 3"/>
+              <a:rPr sz="1100" b="1">
+                <a:solidFill>
+                  <a:srgbClr val="1B7A43"/>
+                </a:solidFill>
+                <a:latin typeface="Segoe UI"/>
+              </a:rPr>
+              <a:t>UN NOMBRE À PUBLIER À CÔTÉ</a:t>
+            </a:r>
+          </a:p>
+        </p:txBody>
+      </p:sp>
+      <p:sp>
+        <p:nvSpPr>
+          <p:cNvPr id="4" name="TextBox 3"/>
+          <p:cNvSpPr txBox="1"/>
+          <p:nvPr/>
+        </p:nvSpPr>
+        <p:spPr>
+          <a:xfrm>
+            <a:off x="731520" y="914400"/>
+            <a:ext cx="10728655" cy="548640"/>
+          </a:xfrm>
+          <a:prstGeom prst="rect">
+            <a:avLst/>
+          </a:prstGeom>
+          <a:noFill/>
+        </p:spPr>
+        <p:txBody>
+          <a:bodyPr wrap="square">
+            <a:spAutoFit/>
+          </a:bodyPr>
+          <a:lstStyle/>
+          <a:p>
+            <a:pPr algn="l"/>
+            <a:r>
+              <a:rPr sz="1400" b="0">
+                <a:solidFill>
+                  <a:srgbClr val="33403A"/>
+                </a:solidFill>
+                <a:latin typeface="Segoe UI"/>
+              </a:rPr>
+              <a:t>À 0,1 nW·cm⁻²·sr⁻¹ un pays peut être éclairé à 40 %. À 5,0, à six pour cent.
+Même pays, même année, même satellite.</a:t>
+            </a:r>
+          </a:p>
+        </p:txBody>
+      </p:sp>
+      <p:sp>
+        <p:nvSpPr>
+          <p:cNvPr id="5" name="Rectangle 4"/>
           <p:cNvSpPr/>
           <p:nvPr/>
         </p:nvSpPr>
         <p:spPr>
           <a:xfrm>
-            <a:off x="731520" y="1371600"/>
+            <a:off x="731520" y="1417320"/>
             <a:ext cx="10728655" cy="960120"/>
           </a:xfrm>
           <a:prstGeom prst="rect">
@@ -4215,9 +4136,619 @@
                 </a:solidFill>
                 <a:latin typeface="Segoe UI"/>
               </a:rPr>
-              <a:t>AUCUN DE CES CAS N'EST VISIBLE DANS LE TABLEAU DE SORTIE — Les trois produisent un nombre bien formaté et plausible. C'est pourquoi le
-laboratoire d'exploration précède le laboratoire d'analyse, et pourquoi
-l'inventaire des artefacts est un livrable et non un supplément optionnel.</a:t>
+              <a:t>LA RÈGLE — Publiez le seuil à côté du nombre. Systématiquement, sans exception.</a:t>
+            </a:r>
+          </a:p>
+        </p:txBody>
+      </p:sp>
+      <p:sp>
+        <p:nvSpPr>
+          <p:cNvPr id="6" name="TextBox 5"/>
+          <p:cNvSpPr txBox="1"/>
+          <p:nvPr/>
+        </p:nvSpPr>
+        <p:spPr>
+          <a:xfrm>
+            <a:off x="731520" y="6400800"/>
+            <a:ext cx="10728655" cy="274320"/>
+          </a:xfrm>
+          <a:prstGeom prst="rect">
+            <a:avLst/>
+          </a:prstGeom>
+          <a:noFill/>
+        </p:spPr>
+        <p:txBody>
+          <a:bodyPr wrap="square">
+            <a:spAutoFit/>
+          </a:bodyPr>
+          <a:lstStyle/>
+          <a:p>
+            <a:pPr algn="l"/>
+            <a:r>
+              <a:rPr sz="900" b="0">
+                <a:solidFill>
+                  <a:srgbClr val="6B7B75"/>
+                </a:solidFill>
+                <a:latin typeface="Segoe UI"/>
+              </a:rPr>
+              <a:t>Banque africaine de développement · UA STATAFRIC · STG17</a:t>
+            </a:r>
+          </a:p>
+        </p:txBody>
+      </p:sp>
+    </p:spTree>
+  </p:cSld>
+  <p:clrMapOvr>
+    <a:masterClrMapping/>
+  </p:clrMapOvr>
+</p:sld>
+</file>
+
+<file path=ppt/slides/slide14.xml><?xml version="1.0" encoding="utf-8"?>
+<p:sld xmlns:a="http://schemas.openxmlformats.org/drawingml/2006/main" xmlns:p="http://schemas.openxmlformats.org/presentationml/2006/main" xmlns:r="http://schemas.openxmlformats.org/officeDocument/2006/relationships">
+  <p:cSld>
+    <p:spTree>
+      <p:nvGrpSpPr>
+        <p:cNvPr id="1" name=""/>
+        <p:cNvGrpSpPr/>
+        <p:nvPr/>
+      </p:nvGrpSpPr>
+      <p:grpSpPr/>
+      <p:sp>
+        <p:nvSpPr>
+          <p:cNvPr id="2" name="Rectangle 1"/>
+          <p:cNvSpPr/>
+          <p:nvPr/>
+        </p:nvSpPr>
+        <p:spPr>
+          <a:xfrm>
+            <a:off x="0" y="0"/>
+            <a:ext cx="12191695" cy="6858000"/>
+          </a:xfrm>
+          <a:prstGeom prst="rect">
+            <a:avLst/>
+          </a:prstGeom>
+          <a:solidFill>
+            <a:srgbClr val="0B2545"/>
+          </a:solidFill>
+          <a:ln>
+            <a:noFill/>
+          </a:ln>
+          <a:effectLst/>
+        </p:spPr>
+        <p:style>
+          <a:lnRef idx="1">
+            <a:schemeClr val="accent1"/>
+          </a:lnRef>
+          <a:fillRef idx="3">
+            <a:schemeClr val="accent1"/>
+          </a:fillRef>
+          <a:effectRef idx="2">
+            <a:schemeClr val="accent1"/>
+          </a:effectRef>
+          <a:fontRef idx="minor">
+            <a:schemeClr val="lt1"/>
+          </a:fontRef>
+        </p:style>
+        <p:txBody>
+          <a:bodyPr rtlCol="0" anchor="ctr"/>
+          <a:lstStyle/>
+          <a:p>
+            <a:pPr algn="ctr"/>
+          </a:p>
+        </p:txBody>
+      </p:sp>
+      <p:sp>
+        <p:nvSpPr>
+          <p:cNvPr id="3" name="TextBox 2"/>
+          <p:cNvSpPr txBox="1"/>
+          <p:nvPr/>
+        </p:nvSpPr>
+        <p:spPr>
+          <a:xfrm>
+            <a:off x="731520" y="502920"/>
+            <a:ext cx="10728655" cy="320040"/>
+          </a:xfrm>
+          <a:prstGeom prst="rect">
+            <a:avLst/>
+          </a:prstGeom>
+          <a:noFill/>
+        </p:spPr>
+        <p:txBody>
+          <a:bodyPr wrap="square">
+            <a:spAutoFit/>
+          </a:bodyPr>
+          <a:lstStyle/>
+          <a:p>
+            <a:pPr algn="l"/>
+            <a:r>
+              <a:rPr sz="1100" b="1">
+                <a:solidFill>
+                  <a:srgbClr val="F2A900"/>
+                </a:solidFill>
+                <a:latin typeface="Segoe UI"/>
+              </a:rPr>
+              <a:t>PARTIE 3</a:t>
+            </a:r>
+          </a:p>
+        </p:txBody>
+      </p:sp>
+      <p:sp>
+        <p:nvSpPr>
+          <p:cNvPr id="4" name="TextBox 3"/>
+          <p:cNvSpPr txBox="1"/>
+          <p:nvPr/>
+        </p:nvSpPr>
+        <p:spPr>
+          <a:xfrm>
+            <a:off x="731520" y="914400"/>
+            <a:ext cx="10728655" cy="914400"/>
+          </a:xfrm>
+          <a:prstGeom prst="rect">
+            <a:avLst/>
+          </a:prstGeom>
+          <a:noFill/>
+        </p:spPr>
+        <p:txBody>
+          <a:bodyPr wrap="square">
+            <a:spAutoFit/>
+          </a:bodyPr>
+          <a:lstStyle/>
+          <a:p>
+            <a:pPr algn="l"/>
+            <a:r>
+              <a:rPr sz="2800" b="1">
+                <a:solidFill>
+                  <a:srgbClr val="FFFFFF"/>
+                </a:solidFill>
+                <a:latin typeface="Segoe UI"/>
+              </a:rPr>
+              <a:t>Les six artefacts</a:t>
+            </a:r>
+          </a:p>
+        </p:txBody>
+      </p:sp>
+      <p:sp>
+        <p:nvSpPr>
+          <p:cNvPr id="5" name="TextBox 4"/>
+          <p:cNvSpPr txBox="1"/>
+          <p:nvPr/>
+        </p:nvSpPr>
+        <p:spPr>
+          <a:xfrm>
+            <a:off x="731520" y="1783080"/>
+            <a:ext cx="10728655" cy="548640"/>
+          </a:xfrm>
+          <a:prstGeom prst="rect">
+            <a:avLst/>
+          </a:prstGeom>
+          <a:noFill/>
+        </p:spPr>
+        <p:txBody>
+          <a:bodyPr wrap="square">
+            <a:spAutoFit/>
+          </a:bodyPr>
+          <a:lstStyle/>
+          <a:p>
+            <a:pPr algn="l"/>
+            <a:r>
+              <a:rPr sz="1400" b="0">
+                <a:solidFill>
+                  <a:srgbClr val="DBE7E0"/>
+                </a:solidFill>
+                <a:latin typeface="Segoe UI"/>
+              </a:rPr>
+              <a:t>Nommés ici. Rencontrés concrètement à 10h30, dans le raster de votre pays.</a:t>
+            </a:r>
+          </a:p>
+        </p:txBody>
+      </p:sp>
+      <p:sp>
+        <p:nvSpPr>
+          <p:cNvPr id="6" name="TextBox 5"/>
+          <p:cNvSpPr txBox="1"/>
+          <p:nvPr/>
+        </p:nvSpPr>
+        <p:spPr>
+          <a:xfrm>
+            <a:off x="731520" y="6400800"/>
+            <a:ext cx="10728655" cy="274320"/>
+          </a:xfrm>
+          <a:prstGeom prst="rect">
+            <a:avLst/>
+          </a:prstGeom>
+          <a:noFill/>
+        </p:spPr>
+        <p:txBody>
+          <a:bodyPr wrap="square">
+            <a:spAutoFit/>
+          </a:bodyPr>
+          <a:lstStyle/>
+          <a:p>
+            <a:pPr algn="l"/>
+            <a:r>
+              <a:rPr sz="900" b="0">
+                <a:solidFill>
+                  <a:srgbClr val="6B7B75"/>
+                </a:solidFill>
+                <a:latin typeface="Segoe UI"/>
+              </a:rPr>
+              <a:t>Banque africaine de développement · UA STATAFRIC · STG17</a:t>
+            </a:r>
+          </a:p>
+        </p:txBody>
+      </p:sp>
+    </p:spTree>
+  </p:cSld>
+  <p:clrMapOvr>
+    <a:masterClrMapping/>
+  </p:clrMapOvr>
+</p:sld>
+</file>
+
+<file path=ppt/slides/slide15.xml><?xml version="1.0" encoding="utf-8"?>
+<p:sld xmlns:a="http://schemas.openxmlformats.org/drawingml/2006/main" xmlns:p="http://schemas.openxmlformats.org/presentationml/2006/main" xmlns:r="http://schemas.openxmlformats.org/officeDocument/2006/relationships">
+  <p:cSld>
+    <p:spTree>
+      <p:nvGrpSpPr>
+        <p:cNvPr id="1" name=""/>
+        <p:cNvGrpSpPr/>
+        <p:nvPr/>
+      </p:nvGrpSpPr>
+      <p:grpSpPr/>
+      <p:sp>
+        <p:nvSpPr>
+          <p:cNvPr id="2" name="Rectangle 1"/>
+          <p:cNvSpPr/>
+          <p:nvPr/>
+        </p:nvSpPr>
+        <p:spPr>
+          <a:xfrm>
+            <a:off x="0" y="0"/>
+            <a:ext cx="12191695" cy="6858000"/>
+          </a:xfrm>
+          <a:prstGeom prst="rect">
+            <a:avLst/>
+          </a:prstGeom>
+          <a:solidFill>
+            <a:srgbClr val="08090F"/>
+          </a:solidFill>
+          <a:ln>
+            <a:noFill/>
+          </a:ln>
+          <a:effectLst/>
+        </p:spPr>
+        <p:style>
+          <a:lnRef idx="1">
+            <a:schemeClr val="accent1"/>
+          </a:lnRef>
+          <a:fillRef idx="3">
+            <a:schemeClr val="accent1"/>
+          </a:fillRef>
+          <a:effectRef idx="2">
+            <a:schemeClr val="accent1"/>
+          </a:effectRef>
+          <a:fontRef idx="minor">
+            <a:schemeClr val="lt1"/>
+          </a:fontRef>
+        </p:style>
+        <p:txBody>
+          <a:bodyPr rtlCol="0" anchor="ctr"/>
+          <a:lstStyle/>
+          <a:p>
+            <a:pPr algn="ctr"/>
+          </a:p>
+        </p:txBody>
+      </p:sp>
+      <p:sp>
+        <p:nvSpPr>
+          <p:cNvPr id="3" name="TextBox 2"/>
+          <p:cNvSpPr txBox="1"/>
+          <p:nvPr/>
+        </p:nvSpPr>
+        <p:spPr>
+          <a:xfrm>
+            <a:off x="731520" y="502920"/>
+            <a:ext cx="10728655" cy="914400"/>
+          </a:xfrm>
+          <a:prstGeom prst="rect">
+            <a:avLst/>
+          </a:prstGeom>
+          <a:noFill/>
+        </p:spPr>
+        <p:txBody>
+          <a:bodyPr wrap="square">
+            <a:spAutoFit/>
+          </a:bodyPr>
+          <a:lstStyle/>
+          <a:p>
+            <a:pPr algn="l"/>
+            <a:r>
+              <a:rPr sz="2800" b="1">
+                <a:solidFill>
+                  <a:srgbClr val="FFFFFF"/>
+                </a:solidFill>
+                <a:latin typeface="Segoe UI"/>
+              </a:rPr>
+              <a:t>Ce que le capteur voit et que vous n'avez pas demandé</a:t>
+            </a:r>
+          </a:p>
+        </p:txBody>
+      </p:sp>
+      <p:sp>
+        <p:nvSpPr>
+          <p:cNvPr id="4" name="Rectangle 3"/>
+          <p:cNvSpPr/>
+          <p:nvPr/>
+        </p:nvSpPr>
+        <p:spPr>
+          <a:xfrm>
+            <a:off x="731520" y="1371600"/>
+            <a:ext cx="10728655" cy="960120"/>
+          </a:xfrm>
+          <a:prstGeom prst="rect">
+            <a:avLst/>
+          </a:prstGeom>
+          <a:solidFill>
+            <a:srgbClr val="F4F8F5"/>
+          </a:solidFill>
+          <a:ln>
+            <a:solidFill>
+              <a:srgbClr val="1B7A43"/>
+            </a:solidFill>
+          </a:ln>
+          <a:effectLst/>
+        </p:spPr>
+        <p:style>
+          <a:lnRef idx="1">
+            <a:schemeClr val="accent1"/>
+          </a:lnRef>
+          <a:fillRef idx="3">
+            <a:schemeClr val="accent1"/>
+          </a:fillRef>
+          <a:effectRef idx="2">
+            <a:schemeClr val="accent1"/>
+          </a:effectRef>
+          <a:fontRef idx="minor">
+            <a:schemeClr val="lt1"/>
+          </a:fontRef>
+        </p:style>
+        <p:txBody>
+          <a:bodyPr rtlCol="0" anchor="ctr" wrap="square"/>
+          <a:lstStyle/>
+          <a:p>
+            <a:pPr algn="ctr"/>
+            <a:r>
+              <a:rPr sz="1200">
+                <a:solidFill>
+                  <a:srgbClr val="33403A"/>
+                </a:solidFill>
+                <a:latin typeface="Segoe UI"/>
+              </a:rPr>
+              <a:t>PLUS DEUX QUE VOUS NE VERREZ PAS AUJOURD'HUI — Saisonnalité  — nuages, aérosols, clair de lune et poussière
+d'harmattan déplacent les séries mensuelles ; les composites annuels le masquent.
+ Discontinuité de capteur  — le raccord DMSP/VIIRS, vu plus haut.</a:t>
+            </a:r>
+          </a:p>
+        </p:txBody>
+      </p:sp>
+      <p:sp>
+        <p:nvSpPr>
+          <p:cNvPr id="5" name="TextBox 4"/>
+          <p:cNvSpPr txBox="1"/>
+          <p:nvPr/>
+        </p:nvSpPr>
+        <p:spPr>
+          <a:xfrm>
+            <a:off x="731520" y="2468880"/>
+            <a:ext cx="10728655" cy="640080"/>
+          </a:xfrm>
+          <a:prstGeom prst="rect">
+            <a:avLst/>
+          </a:prstGeom>
+          <a:noFill/>
+        </p:spPr>
+        <p:txBody>
+          <a:bodyPr wrap="square">
+            <a:spAutoFit/>
+          </a:bodyPr>
+          <a:lstStyle/>
+          <a:p>
+            <a:pPr algn="l"/>
+            <a:r>
+              <a:rPr sz="1100" b="0">
+                <a:solidFill>
+                  <a:srgbClr val="6B7B75"/>
+                </a:solidFill>
+                <a:latin typeface="Segoe UI"/>
+              </a:rPr>
+              <a:t>FIGURE — capturez la diapositive 15 du deck HTML et collez-la ici.</a:t>
+            </a:r>
+          </a:p>
+        </p:txBody>
+      </p:sp>
+      <p:sp>
+        <p:nvSpPr>
+          <p:cNvPr id="6" name="TextBox 5"/>
+          <p:cNvSpPr txBox="1"/>
+          <p:nvPr/>
+        </p:nvSpPr>
+        <p:spPr>
+          <a:xfrm>
+            <a:off x="731520" y="6400800"/>
+            <a:ext cx="10728655" cy="274320"/>
+          </a:xfrm>
+          <a:prstGeom prst="rect">
+            <a:avLst/>
+          </a:prstGeom>
+          <a:noFill/>
+        </p:spPr>
+        <p:txBody>
+          <a:bodyPr wrap="square">
+            <a:spAutoFit/>
+          </a:bodyPr>
+          <a:lstStyle/>
+          <a:p>
+            <a:pPr algn="l"/>
+            <a:r>
+              <a:rPr sz="900" b="0">
+                <a:solidFill>
+                  <a:srgbClr val="6B7B75"/>
+                </a:solidFill>
+                <a:latin typeface="Segoe UI"/>
+              </a:rPr>
+              <a:t>Banque africaine de développement · UA STATAFRIC · STG17</a:t>
+            </a:r>
+          </a:p>
+        </p:txBody>
+      </p:sp>
+    </p:spTree>
+  </p:cSld>
+  <p:clrMapOvr>
+    <a:masterClrMapping/>
+  </p:clrMapOvr>
+</p:sld>
+</file>
+
+<file path=ppt/slides/slide16.xml><?xml version="1.0" encoding="utf-8"?>
+<p:sld xmlns:a="http://schemas.openxmlformats.org/drawingml/2006/main" xmlns:p="http://schemas.openxmlformats.org/presentationml/2006/main" xmlns:r="http://schemas.openxmlformats.org/officeDocument/2006/relationships">
+  <p:cSld>
+    <p:spTree>
+      <p:nvGrpSpPr>
+        <p:cNvPr id="1" name=""/>
+        <p:cNvGrpSpPr/>
+        <p:nvPr/>
+      </p:nvGrpSpPr>
+      <p:grpSpPr/>
+      <p:sp>
+        <p:nvSpPr>
+          <p:cNvPr id="2" name="Rectangle 1"/>
+          <p:cNvSpPr/>
+          <p:nvPr/>
+        </p:nvSpPr>
+        <p:spPr>
+          <a:xfrm>
+            <a:off x="0" y="0"/>
+            <a:ext cx="12191695" cy="60000"/>
+          </a:xfrm>
+          <a:prstGeom prst="rect">
+            <a:avLst/>
+          </a:prstGeom>
+          <a:solidFill>
+            <a:srgbClr val="F2A900"/>
+          </a:solidFill>
+          <a:ln>
+            <a:noFill/>
+          </a:ln>
+        </p:spPr>
+        <p:style>
+          <a:lnRef idx="1">
+            <a:schemeClr val="accent1"/>
+          </a:lnRef>
+          <a:fillRef idx="3">
+            <a:schemeClr val="accent1"/>
+          </a:fillRef>
+          <a:effectRef idx="2">
+            <a:schemeClr val="accent1"/>
+          </a:effectRef>
+          <a:fontRef idx="minor">
+            <a:schemeClr val="lt1"/>
+          </a:fontRef>
+        </p:style>
+        <p:txBody>
+          <a:bodyPr rtlCol="0" anchor="ctr"/>
+          <a:lstStyle/>
+          <a:p>
+            <a:pPr algn="ctr"/>
+          </a:p>
+        </p:txBody>
+      </p:sp>
+      <p:sp>
+        <p:nvSpPr>
+          <p:cNvPr id="3" name="TextBox 2"/>
+          <p:cNvSpPr txBox="1"/>
+          <p:nvPr/>
+        </p:nvSpPr>
+        <p:spPr>
+          <a:xfrm>
+            <a:off x="731520" y="502920"/>
+            <a:ext cx="10728655" cy="914400"/>
+          </a:xfrm>
+          <a:prstGeom prst="rect">
+            <a:avLst/>
+          </a:prstGeom>
+          <a:noFill/>
+        </p:spPr>
+        <p:txBody>
+          <a:bodyPr wrap="square">
+            <a:spAutoFit/>
+          </a:bodyPr>
+          <a:lstStyle/>
+          <a:p>
+            <a:pPr algn="l"/>
+            <a:r>
+              <a:rPr sz="2800" b="1">
+                <a:solidFill>
+                  <a:srgbClr val="0B2545"/>
+                </a:solidFill>
+                <a:latin typeface="Segoe UI"/>
+              </a:rPr>
+              <a:t>Trois façons de se tromper</a:t>
+            </a:r>
+          </a:p>
+        </p:txBody>
+      </p:sp>
+      <p:sp>
+        <p:nvSpPr>
+          <p:cNvPr id="4" name="Rectangle 3"/>
+          <p:cNvSpPr/>
+          <p:nvPr/>
+        </p:nvSpPr>
+        <p:spPr>
+          <a:xfrm>
+            <a:off x="731520" y="1371600"/>
+            <a:ext cx="10728655" cy="960120"/>
+          </a:xfrm>
+          <a:prstGeom prst="rect">
+            <a:avLst/>
+          </a:prstGeom>
+          <a:solidFill>
+            <a:srgbClr val="F4F8F5"/>
+          </a:solidFill>
+          <a:ln>
+            <a:solidFill>
+              <a:srgbClr val="1B7A43"/>
+            </a:solidFill>
+          </a:ln>
+          <a:effectLst/>
+        </p:spPr>
+        <p:style>
+          <a:lnRef idx="1">
+            <a:schemeClr val="accent1"/>
+          </a:lnRef>
+          <a:fillRef idx="3">
+            <a:schemeClr val="accent1"/>
+          </a:fillRef>
+          <a:effectRef idx="2">
+            <a:schemeClr val="accent1"/>
+          </a:effectRef>
+          <a:fontRef idx="minor">
+            <a:schemeClr val="lt1"/>
+          </a:fontRef>
+        </p:style>
+        <p:txBody>
+          <a:bodyPr rtlCol="0" anchor="ctr" wrap="square"/>
+          <a:lstStyle/>
+          <a:p>
+            <a:pPr algn="ctr"/>
+            <a:r>
+              <a:rPr sz="1200">
+                <a:solidFill>
+                  <a:srgbClr val="33403A"/>
+                </a:solidFill>
+                <a:latin typeface="Segoe UI"/>
+              </a:rPr>
+              <a:t>TROIS NOMBRES PLAUSIBLES, BIEN FORMATÉS — Aucun n'est visible dans le tableau de sortie.</a:t>
             </a:r>
           </a:p>
         </p:txBody>
@@ -4276,7 +4807,7 @@
                           </a:solidFill>
                           <a:latin typeface="Segoe UI"/>
                         </a:rPr>
-                        <a:t>Ce qui s'est réellement passé</a:t>
+                        <a:t>Ce qui s'est vraiment passé</a:t>
                       </a:r>
                     </a:p>
                   </a:txBody>
@@ -4294,7 +4825,7 @@
                           </a:solidFill>
                           <a:latin typeface="Segoe UI"/>
                         </a:rPr>
-                        <a:t>Le contrôle qui l'aurait détecté</a:t>
+                        <a:t>Le contrôle qui le détecte</a:t>
                       </a:r>
                     </a:p>
                   </a:txBody>
@@ -4332,7 +4863,7 @@
                           </a:solidFill>
                           <a:latin typeface="Segoe UI"/>
                         </a:rPr>
-                        <a:t>Il manquait une tuile satellite à l'année précédente — deux tiers du territoire</a:t>
+                        <a:t>Une tuile manquante l'année d'avant</a:t>
                       </a:r>
                     </a:p>
                   </a:txBody>
@@ -4350,7 +4881,7 @@
                           </a:solidFill>
                           <a:latin typeface="Segoe UI"/>
                         </a:rPr>
-                        <a:t>L'audit de complétude, étape 3 du laboratoire de ce matin</a:t>
+                        <a:t>Audit de complétude  labo 1, étape 3</a:t>
                       </a:r>
                     </a:p>
                   </a:txBody>
@@ -4370,7 +4901,7 @@
                           </a:solidFill>
                           <a:latin typeface="Segoe UI"/>
                         </a:rPr>
-                        <a:t>« Cette région est la plus active économiquement »</a:t>
+                        <a:t>« Notre région la plus active »</a:t>
                       </a:r>
                     </a:p>
                   </a:txBody>
@@ -4388,7 +4919,7 @@
                           </a:solidFill>
                           <a:latin typeface="Segoe UI"/>
                         </a:rPr>
-                        <a:t>Une torchère de gaz. Population : 400</a:t>
+                        <a:t>Une torchère. Population : 400</a:t>
                       </a:r>
                     </a:p>
                   </a:txBody>
@@ -4406,7 +4937,7 @@
                           </a:solidFill>
                           <a:latin typeface="Segoe UI"/>
                         </a:rPr>
-                        <a:t>Classer les pixels les plus intenses et les recouper avec une carte des localités</a:t>
+                        <a:t>Classer les pixels intenses contre une carte des localités</a:t>
                       </a:r>
                     </a:p>
                   </a:txBody>
@@ -4444,7 +4975,7 @@
                           </a:solidFill>
                           <a:latin typeface="Segoe UI"/>
                         </a:rPr>
-                        <a:t>La capitale a saturé le capteur en 2018 et est plate dans les données depuis</a:t>
+                        <a:t>La capitale a saturé le capteur en 2018</a:t>
                       </a:r>
                     </a:p>
                   </a:txBody>
@@ -4462,7 +4993,7 @@
                           </a:solidFill>
                           <a:latin typeface="Segoe UI"/>
                         </a:rPr>
-                        <a:t>Une coupe à travers l'amas le plus lumineux — chercher le sommet plat</a:t>
+                        <a:t>Couper l'amas le plus vif : le sommet plat</a:t>
                       </a:r>
                     </a:p>
                   </a:txBody>
@@ -4473,847 +5004,6 @@
           </a:graphicData>
         </a:graphic>
       </p:graphicFrame>
-      <p:sp>
-        <p:nvSpPr>
-          <p:cNvPr id="6" name="TextBox 5"/>
-          <p:cNvSpPr txBox="1"/>
-          <p:nvPr/>
-        </p:nvSpPr>
-        <p:spPr>
-          <a:xfrm>
-            <a:off x="731520" y="6400800"/>
-            <a:ext cx="10728655" cy="274320"/>
-          </a:xfrm>
-          <a:prstGeom prst="rect">
-            <a:avLst/>
-          </a:prstGeom>
-          <a:noFill/>
-        </p:spPr>
-        <p:txBody>
-          <a:bodyPr wrap="square">
-            <a:spAutoFit/>
-          </a:bodyPr>
-          <a:lstStyle/>
-          <a:p>
-            <a:pPr algn="l"/>
-            <a:r>
-              <a:rPr sz="900" b="0">
-                <a:solidFill>
-                  <a:srgbClr val="6B7B75"/>
-                </a:solidFill>
-                <a:latin typeface="Segoe UI"/>
-              </a:rPr>
-              <a:t>Banque africaine de développement · UA STATAFRIC · STG17</a:t>
-            </a:r>
-          </a:p>
-        </p:txBody>
-      </p:sp>
-    </p:spTree>
-  </p:cSld>
-  <p:clrMapOvr>
-    <a:masterClrMapping/>
-  </p:clrMapOvr>
-</p:sld>
-</file>
-
-<file path=ppt/slides/slide14.xml><?xml version="1.0" encoding="utf-8"?>
-<p:sld xmlns:a="http://schemas.openxmlformats.org/drawingml/2006/main" xmlns:p="http://schemas.openxmlformats.org/presentationml/2006/main" xmlns:r="http://schemas.openxmlformats.org/officeDocument/2006/relationships">
-  <p:cSld>
-    <p:spTree>
-      <p:nvGrpSpPr>
-        <p:cNvPr id="1" name=""/>
-        <p:cNvGrpSpPr/>
-        <p:nvPr/>
-      </p:nvGrpSpPr>
-      <p:grpSpPr/>
-      <p:sp>
-        <p:nvSpPr>
-          <p:cNvPr id="2" name="Rectangle 1"/>
-          <p:cNvSpPr/>
-          <p:nvPr/>
-        </p:nvSpPr>
-        <p:spPr>
-          <a:xfrm>
-            <a:off x="0" y="0"/>
-            <a:ext cx="12191695" cy="60000"/>
-          </a:xfrm>
-          <a:prstGeom prst="rect">
-            <a:avLst/>
-          </a:prstGeom>
-          <a:solidFill>
-            <a:srgbClr val="F2A900"/>
-          </a:solidFill>
-          <a:ln>
-            <a:noFill/>
-          </a:ln>
-        </p:spPr>
-        <p:style>
-          <a:lnRef idx="1">
-            <a:schemeClr val="accent1"/>
-          </a:lnRef>
-          <a:fillRef idx="3">
-            <a:schemeClr val="accent1"/>
-          </a:fillRef>
-          <a:effectRef idx="2">
-            <a:schemeClr val="accent1"/>
-          </a:effectRef>
-          <a:fontRef idx="minor">
-            <a:schemeClr val="lt1"/>
-          </a:fontRef>
-        </p:style>
-        <p:txBody>
-          <a:bodyPr rtlCol="0" anchor="ctr"/>
-          <a:lstStyle/>
-          <a:p>
-            <a:pPr algn="ctr"/>
-          </a:p>
-        </p:txBody>
-      </p:sp>
-      <p:sp>
-        <p:nvSpPr>
-          <p:cNvPr id="3" name="TextBox 2"/>
-          <p:cNvSpPr txBox="1"/>
-          <p:nvPr/>
-        </p:nvSpPr>
-        <p:spPr>
-          <a:xfrm>
-            <a:off x="731520" y="502920"/>
-            <a:ext cx="10728655" cy="914400"/>
-          </a:xfrm>
-          <a:prstGeom prst="rect">
-            <a:avLst/>
-          </a:prstGeom>
-          <a:noFill/>
-        </p:spPr>
-        <p:txBody>
-          <a:bodyPr wrap="square">
-            <a:spAutoFit/>
-          </a:bodyPr>
-          <a:lstStyle/>
-          <a:p>
-            <a:pPr algn="l"/>
-            <a:r>
-              <a:rPr sz="2800" b="1">
-                <a:solidFill>
-                  <a:srgbClr val="0B2545"/>
-                </a:solidFill>
-                <a:latin typeface="Segoe UI"/>
-              </a:rPr>
-              <a:t>Ce que les NTL approchent bien — et ce qu'elles n'approchent pas</a:t>
-            </a:r>
-          </a:p>
-        </p:txBody>
-      </p:sp>
-      <p:sp>
-        <p:nvSpPr>
-          <p:cNvPr id="4" name="TextBox 3"/>
-          <p:cNvSpPr txBox="1"/>
-          <p:nvPr/>
-        </p:nvSpPr>
-        <p:spPr>
-          <a:xfrm>
-            <a:off x="731520" y="1371600"/>
-            <a:ext cx="10728655" cy="4389120"/>
-          </a:xfrm>
-          <a:prstGeom prst="rect">
-            <a:avLst/>
-          </a:prstGeom>
-          <a:noFill/>
-        </p:spPr>
-        <p:txBody>
-          <a:bodyPr wrap="square">
-            <a:spAutoFit/>
-          </a:bodyPr>
-          <a:lstStyle/>
-          <a:p>
-            <a:pPr>
-              <a:spcAft>
-                <a:spcPts val="700"/>
-              </a:spcAft>
-            </a:pPr>
-            <a:r>
-              <a:rPr sz="1400">
-                <a:solidFill>
-                  <a:srgbClr val="33403A"/>
-                </a:solidFill>
-                <a:latin typeface="Segoe UI"/>
-              </a:rPr>
-              <a:t>•  Progrès de l'électrification  — là où la lumière atteint de nouveaux lieux</a:t>
-            </a:r>
-          </a:p>
-          <a:p>
-            <a:pPr>
-              <a:spcAft>
-                <a:spcPts val="700"/>
-              </a:spcAft>
-            </a:pPr>
-            <a:r>
-              <a:rPr sz="1400">
-                <a:solidFill>
-                  <a:srgbClr val="33403A"/>
-                </a:solidFill>
-                <a:latin typeface="Segoe UI"/>
-              </a:rPr>
-              <a:t>•  Urbanisation et croissance des localités</a:t>
-            </a:r>
-          </a:p>
-          <a:p>
-            <a:pPr>
-              <a:spcAft>
-                <a:spcPts val="700"/>
-              </a:spcAft>
-            </a:pPr>
-            <a:r>
-              <a:rPr sz="1400">
-                <a:solidFill>
-                  <a:srgbClr val="33403A"/>
-                </a:solidFill>
-                <a:latin typeface="Segoe UI"/>
-              </a:rPr>
-              <a:t>•  Impact des crises et des conflits  — une perte brutale de lumière est sans ambiguïté</a:t>
-            </a:r>
-          </a:p>
-          <a:p>
-            <a:pPr>
-              <a:spcAft>
-                <a:spcPts val="700"/>
-              </a:spcAft>
-            </a:pPr>
-            <a:r>
-              <a:rPr sz="1400">
-                <a:solidFill>
-                  <a:srgbClr val="33403A"/>
-                </a:solidFill>
-                <a:latin typeface="Segoe UI"/>
-              </a:rPr>
-              <a:t>•  Inégalité spatiale des infrastructures</a:t>
-            </a:r>
-          </a:p>
-          <a:p>
-            <a:pPr>
-              <a:spcAft>
-                <a:spcPts val="700"/>
-              </a:spcAft>
-            </a:pPr>
-            <a:r>
-              <a:rPr sz="1400">
-                <a:solidFill>
-                  <a:srgbClr val="33403A"/>
-                </a:solidFill>
-                <a:latin typeface="Segoe UI"/>
-              </a:rPr>
-              <a:t>•  Comparaison relative entre districts  la même année</a:t>
-            </a:r>
-          </a:p>
-          <a:p>
-            <a:pPr>
-              <a:spcAft>
-                <a:spcPts val="700"/>
-              </a:spcAft>
-            </a:pPr>
-            <a:r>
-              <a:rPr sz="1400">
-                <a:solidFill>
-                  <a:srgbClr val="33403A"/>
-                </a:solidFill>
-                <a:latin typeface="Segoe UI"/>
-              </a:rPr>
-              <a:t>•  Le PIB en niveau.  Corrélé, pas égal. L'élasticité diffère selon le pays et la décennie</a:t>
-            </a:r>
-          </a:p>
-          <a:p>
-            <a:pPr>
-              <a:spcAft>
-                <a:spcPts val="700"/>
-              </a:spcAft>
-            </a:pPr>
-            <a:r>
-              <a:rPr sz="1400">
-                <a:solidFill>
-                  <a:srgbClr val="33403A"/>
-                </a:solidFill>
-                <a:latin typeface="Segoe UI"/>
-              </a:rPr>
-              <a:t>•  Le taux de raccordement des ménages.  Un ménage raccordé qui n'a pas les moyens de consommer n'émet aucune lumière</a:t>
-            </a:r>
-          </a:p>
-          <a:p>
-            <a:pPr>
-              <a:spcAft>
-                <a:spcPts val="700"/>
-              </a:spcAft>
-            </a:pPr>
-            <a:r>
-              <a:rPr sz="1400">
-                <a:solidFill>
-                  <a:srgbClr val="33403A"/>
-                </a:solidFill>
-                <a:latin typeface="Segoe UI"/>
-              </a:rPr>
-              <a:t>•  L'activité économique informelle  qui se déroule de jour</a:t>
-            </a:r>
-          </a:p>
-          <a:p>
-            <a:pPr>
-              <a:spcAft>
-                <a:spcPts val="700"/>
-              </a:spcAft>
-            </a:pPr>
-            <a:r>
-              <a:rPr sz="1400">
-                <a:solidFill>
-                  <a:srgbClr val="33403A"/>
-                </a:solidFill>
-                <a:latin typeface="Segoe UI"/>
-              </a:rPr>
-              <a:t>•  Toute analyse à l'échelle du village.  Des pixels de 500 m et le halo rendent les petites localités peu fiables</a:t>
-            </a:r>
-          </a:p>
-        </p:txBody>
-      </p:sp>
-      <p:sp>
-        <p:nvSpPr>
-          <p:cNvPr id="5" name="Rectangle 4"/>
-          <p:cNvSpPr/>
-          <p:nvPr/>
-        </p:nvSpPr>
-        <p:spPr>
-          <a:xfrm>
-            <a:off x="731520" y="4663440"/>
-            <a:ext cx="10728655" cy="960120"/>
-          </a:xfrm>
-          <a:prstGeom prst="rect">
-            <a:avLst/>
-          </a:prstGeom>
-          <a:solidFill>
-            <a:srgbClr val="F4F8F5"/>
-          </a:solidFill>
-          <a:ln>
-            <a:solidFill>
-              <a:srgbClr val="1B7A43"/>
-            </a:solidFill>
-          </a:ln>
-          <a:effectLst/>
-        </p:spPr>
-        <p:style>
-          <a:lnRef idx="1">
-            <a:schemeClr val="accent1"/>
-          </a:lnRef>
-          <a:fillRef idx="3">
-            <a:schemeClr val="accent1"/>
-          </a:fillRef>
-          <a:effectRef idx="2">
-            <a:schemeClr val="accent1"/>
-          </a:effectRef>
-          <a:fontRef idx="minor">
-            <a:schemeClr val="lt1"/>
-          </a:fontRef>
-        </p:style>
-        <p:txBody>
-          <a:bodyPr rtlCol="0" anchor="ctr" wrap="square"/>
-          <a:lstStyle/>
-          <a:p>
-            <a:pPr algn="ctr"/>
-            <a:r>
-              <a:rPr sz="1200">
-                <a:solidFill>
-                  <a:srgbClr val="33403A"/>
-                </a:solidFill>
-                <a:latin typeface="Segoe UI"/>
-              </a:rPr>
-              <a:t>LE CADRAGE HONNÊTE POUR UN OFFICE STATISTIQUE — « Un indicateur spatialement détaillé qui corrèle avec X dans notre pays à
-r = 0,NN, adapté à Y, inadapté à Z. »  Cette phrase — avec votre propre
-coefficient de corrélation dedans — est ce que vous produirez cet après-midi.</a:t>
-            </a:r>
-          </a:p>
-        </p:txBody>
-      </p:sp>
-      <p:sp>
-        <p:nvSpPr>
-          <p:cNvPr id="6" name="TextBox 5"/>
-          <p:cNvSpPr txBox="1"/>
-          <p:nvPr/>
-        </p:nvSpPr>
-        <p:spPr>
-          <a:xfrm>
-            <a:off x="731520" y="6400800"/>
-            <a:ext cx="10728655" cy="274320"/>
-          </a:xfrm>
-          <a:prstGeom prst="rect">
-            <a:avLst/>
-          </a:prstGeom>
-          <a:noFill/>
-        </p:spPr>
-        <p:txBody>
-          <a:bodyPr wrap="square">
-            <a:spAutoFit/>
-          </a:bodyPr>
-          <a:lstStyle/>
-          <a:p>
-            <a:pPr algn="l"/>
-            <a:r>
-              <a:rPr sz="900" b="0">
-                <a:solidFill>
-                  <a:srgbClr val="6B7B75"/>
-                </a:solidFill>
-                <a:latin typeface="Segoe UI"/>
-              </a:rPr>
-              <a:t>Banque africaine de développement · UA STATAFRIC · STG17</a:t>
-            </a:r>
-          </a:p>
-        </p:txBody>
-      </p:sp>
-    </p:spTree>
-  </p:cSld>
-  <p:clrMapOvr>
-    <a:masterClrMapping/>
-  </p:clrMapOvr>
-</p:sld>
-</file>
-
-<file path=ppt/slides/slide15.xml><?xml version="1.0" encoding="utf-8"?>
-<p:sld xmlns:a="http://schemas.openxmlformats.org/drawingml/2006/main" xmlns:p="http://schemas.openxmlformats.org/presentationml/2006/main" xmlns:r="http://schemas.openxmlformats.org/officeDocument/2006/relationships">
-  <p:cSld>
-    <p:spTree>
-      <p:nvGrpSpPr>
-        <p:cNvPr id="1" name=""/>
-        <p:cNvGrpSpPr/>
-        <p:nvPr/>
-      </p:nvGrpSpPr>
-      <p:grpSpPr/>
-      <p:sp>
-        <p:nvSpPr>
-          <p:cNvPr id="2" name="Rectangle 1"/>
-          <p:cNvSpPr/>
-          <p:nvPr/>
-        </p:nvSpPr>
-        <p:spPr>
-          <a:xfrm>
-            <a:off x="0" y="0"/>
-            <a:ext cx="12191695" cy="60000"/>
-          </a:xfrm>
-          <a:prstGeom prst="rect">
-            <a:avLst/>
-          </a:prstGeom>
-          <a:solidFill>
-            <a:srgbClr val="F2A900"/>
-          </a:solidFill>
-          <a:ln>
-            <a:noFill/>
-          </a:ln>
-        </p:spPr>
-        <p:style>
-          <a:lnRef idx="1">
-            <a:schemeClr val="accent1"/>
-          </a:lnRef>
-          <a:fillRef idx="3">
-            <a:schemeClr val="accent1"/>
-          </a:fillRef>
-          <a:effectRef idx="2">
-            <a:schemeClr val="accent1"/>
-          </a:effectRef>
-          <a:fontRef idx="minor">
-            <a:schemeClr val="lt1"/>
-          </a:fontRef>
-        </p:style>
-        <p:txBody>
-          <a:bodyPr rtlCol="0" anchor="ctr"/>
-          <a:lstStyle/>
-          <a:p>
-            <a:pPr algn="ctr"/>
-          </a:p>
-        </p:txBody>
-      </p:sp>
-      <p:sp>
-        <p:nvSpPr>
-          <p:cNvPr id="3" name="TextBox 2"/>
-          <p:cNvSpPr txBox="1"/>
-          <p:nvPr/>
-        </p:nvSpPr>
-        <p:spPr>
-          <a:xfrm>
-            <a:off x="731520" y="502920"/>
-            <a:ext cx="10728655" cy="914400"/>
-          </a:xfrm>
-          <a:prstGeom prst="rect">
-            <a:avLst/>
-          </a:prstGeom>
-          <a:noFill/>
-        </p:spPr>
-        <p:txBody>
-          <a:bodyPr wrap="square">
-            <a:spAutoFit/>
-          </a:bodyPr>
-          <a:lstStyle/>
-          <a:p>
-            <a:pPr algn="l"/>
-            <a:r>
-              <a:rPr sz="2800" b="1">
-                <a:solidFill>
-                  <a:srgbClr val="0B2545"/>
-                </a:solidFill>
-                <a:latin typeface="Segoe UI"/>
-              </a:rPr>
-              <a:t>Ce que vous aurez à 17h00</a:t>
-            </a:r>
-          </a:p>
-        </p:txBody>
-      </p:sp>
-      <p:sp>
-        <p:nvSpPr>
-          <p:cNvPr id="4" name="TextBox 3"/>
-          <p:cNvSpPr txBox="1"/>
-          <p:nvPr/>
-        </p:nvSpPr>
-        <p:spPr>
-          <a:xfrm>
-            <a:off x="731520" y="1371600"/>
-            <a:ext cx="10728655" cy="548640"/>
-          </a:xfrm>
-          <a:prstGeom prst="rect">
-            <a:avLst/>
-          </a:prstGeom>
-          <a:noFill/>
-        </p:spPr>
-        <p:txBody>
-          <a:bodyPr wrap="square">
-            <a:spAutoFit/>
-          </a:bodyPr>
-          <a:lstStyle/>
-          <a:p>
-            <a:pPr algn="l"/>
-            <a:r>
-              <a:rPr sz="1400" b="0">
-                <a:solidFill>
-                  <a:srgbClr val="33403A"/>
-                </a:solidFill>
-                <a:latin typeface="Segoe UI"/>
-              </a:rPr>
-              <a:t>Chacun de ces éléments rejoint le dépôt de votre pays vendredi, avec une
-licence, des métadonnées et un DOI. Un autre office africain doit pouvoir prendre
-votre carnet, changer une ligne, et l'exécuter sur son propre territoire.</a:t>
-            </a:r>
-          </a:p>
-        </p:txBody>
-      </p:sp>
-      <p:sp>
-        <p:nvSpPr>
-          <p:cNvPr id="5" name="TextBox 4"/>
-          <p:cNvSpPr txBox="1"/>
-          <p:nvPr/>
-        </p:nvSpPr>
-        <p:spPr>
-          <a:xfrm>
-            <a:off x="731520" y="1874520"/>
-            <a:ext cx="10728655" cy="457200"/>
-          </a:xfrm>
-          <a:prstGeom prst="rect">
-            <a:avLst/>
-          </a:prstGeom>
-          <a:noFill/>
-        </p:spPr>
-        <p:txBody>
-          <a:bodyPr wrap="square">
-            <a:spAutoFit/>
-          </a:bodyPr>
-          <a:lstStyle/>
-          <a:p>
-            <a:pPr algn="l"/>
-            <a:r>
-              <a:rPr sz="1500" b="1">
-                <a:solidFill>
-                  <a:srgbClr val="1B7A43"/>
-                </a:solidFill>
-                <a:latin typeface="Segoe UI"/>
-              </a:rPr>
-              <a:t>1  Raster national découpé</a:t>
-            </a:r>
-          </a:p>
-        </p:txBody>
-      </p:sp>
-      <p:sp>
-        <p:nvSpPr>
-          <p:cNvPr id="6" name="Rectangle 5"/>
-          <p:cNvSpPr/>
-          <p:nvPr/>
-        </p:nvSpPr>
-        <p:spPr>
-          <a:xfrm>
-            <a:off x="731520" y="2423160"/>
-            <a:ext cx="10728655" cy="960120"/>
-          </a:xfrm>
-          <a:prstGeom prst="rect">
-            <a:avLst/>
-          </a:prstGeom>
-          <a:solidFill>
-            <a:srgbClr val="F4F8F5"/>
-          </a:solidFill>
-          <a:ln>
-            <a:solidFill>
-              <a:srgbClr val="1B7A43"/>
-            </a:solidFill>
-          </a:ln>
-          <a:effectLst/>
-        </p:spPr>
-        <p:style>
-          <a:lnRef idx="1">
-            <a:schemeClr val="accent1"/>
-          </a:lnRef>
-          <a:fillRef idx="3">
-            <a:schemeClr val="accent1"/>
-          </a:fillRef>
-          <a:effectRef idx="2">
-            <a:schemeClr val="accent1"/>
-          </a:effectRef>
-          <a:fontRef idx="minor">
-            <a:schemeClr val="lt1"/>
-          </a:fontRef>
-        </p:style>
-        <p:txBody>
-          <a:bodyPr rtlCol="0" anchor="ctr" wrap="square"/>
-          <a:lstStyle/>
-          <a:p>
-            <a:pPr algn="ctr"/>
-            <a:r>
-              <a:rPr sz="1200">
-                <a:solidFill>
-                  <a:srgbClr val="33403A"/>
-                </a:solidFill>
-                <a:latin typeface="Segoe UI"/>
-              </a:rPr>
-              <a:t>UNE SEULE VARIABLE — COUNTRY_ISO3 = "CIV"  
-Frontières, tuiles satellitaires, projection, emprise cartographique et tous les
-titres de figures en découlent. Le registre couvre les 55 États membres de l'Union
-africaine.</a:t>
-            </a:r>
-          </a:p>
-        </p:txBody>
-      </p:sp>
-      <p:sp>
-        <p:nvSpPr>
-          <p:cNvPr id="7" name="TextBox 6"/>
-          <p:cNvSpPr txBox="1"/>
-          <p:nvPr/>
-        </p:nvSpPr>
-        <p:spPr>
-          <a:xfrm>
-            <a:off x="731520" y="6400800"/>
-            <a:ext cx="10728655" cy="274320"/>
-          </a:xfrm>
-          <a:prstGeom prst="rect">
-            <a:avLst/>
-          </a:prstGeom>
-          <a:noFill/>
-        </p:spPr>
-        <p:txBody>
-          <a:bodyPr wrap="square">
-            <a:spAutoFit/>
-          </a:bodyPr>
-          <a:lstStyle/>
-          <a:p>
-            <a:pPr algn="l"/>
-            <a:r>
-              <a:rPr sz="900" b="0">
-                <a:solidFill>
-                  <a:srgbClr val="6B7B75"/>
-                </a:solidFill>
-                <a:latin typeface="Segoe UI"/>
-              </a:rPr>
-              <a:t>Banque africaine de développement · UA STATAFRIC · STG17</a:t>
-            </a:r>
-          </a:p>
-        </p:txBody>
-      </p:sp>
-    </p:spTree>
-  </p:cSld>
-  <p:clrMapOvr>
-    <a:masterClrMapping/>
-  </p:clrMapOvr>
-</p:sld>
-</file>
-
-<file path=ppt/slides/slide16.xml><?xml version="1.0" encoding="utf-8"?>
-<p:sld xmlns:a="http://schemas.openxmlformats.org/drawingml/2006/main" xmlns:p="http://schemas.openxmlformats.org/presentationml/2006/main" xmlns:r="http://schemas.openxmlformats.org/officeDocument/2006/relationships">
-  <p:cSld>
-    <p:spTree>
-      <p:nvGrpSpPr>
-        <p:cNvPr id="1" name=""/>
-        <p:cNvGrpSpPr/>
-        <p:nvPr/>
-      </p:nvGrpSpPr>
-      <p:grpSpPr/>
-      <p:sp>
-        <p:nvSpPr>
-          <p:cNvPr id="2" name="Rectangle 1"/>
-          <p:cNvSpPr/>
-          <p:nvPr/>
-        </p:nvSpPr>
-        <p:spPr>
-          <a:xfrm>
-            <a:off x="0" y="0"/>
-            <a:ext cx="12191695" cy="60000"/>
-          </a:xfrm>
-          <a:prstGeom prst="rect">
-            <a:avLst/>
-          </a:prstGeom>
-          <a:solidFill>
-            <a:srgbClr val="F2A900"/>
-          </a:solidFill>
-          <a:ln>
-            <a:noFill/>
-          </a:ln>
-        </p:spPr>
-        <p:style>
-          <a:lnRef idx="1">
-            <a:schemeClr val="accent1"/>
-          </a:lnRef>
-          <a:fillRef idx="3">
-            <a:schemeClr val="accent1"/>
-          </a:fillRef>
-          <a:effectRef idx="2">
-            <a:schemeClr val="accent1"/>
-          </a:effectRef>
-          <a:fontRef idx="minor">
-            <a:schemeClr val="lt1"/>
-          </a:fontRef>
-        </p:style>
-        <p:txBody>
-          <a:bodyPr rtlCol="0" anchor="ctr"/>
-          <a:lstStyle/>
-          <a:p>
-            <a:pPr algn="ctr"/>
-          </a:p>
-        </p:txBody>
-      </p:sp>
-      <p:sp>
-        <p:nvSpPr>
-          <p:cNvPr id="3" name="TextBox 2"/>
-          <p:cNvSpPr txBox="1"/>
-          <p:nvPr/>
-        </p:nvSpPr>
-        <p:spPr>
-          <a:xfrm>
-            <a:off x="731520" y="502920"/>
-            <a:ext cx="10728655" cy="914400"/>
-          </a:xfrm>
-          <a:prstGeom prst="rect">
-            <a:avLst/>
-          </a:prstGeom>
-          <a:noFill/>
-        </p:spPr>
-        <p:txBody>
-          <a:bodyPr wrap="square">
-            <a:spAutoFit/>
-          </a:bodyPr>
-          <a:lstStyle/>
-          <a:p>
-            <a:pPr algn="l"/>
-            <a:r>
-              <a:rPr sz="2800" b="1">
-                <a:solidFill>
-                  <a:srgbClr val="0B2545"/>
-                </a:solidFill>
-                <a:latin typeface="Segoe UI"/>
-              </a:rPr>
-              <a:t>Mon indicateur est-il publiable ? Un cadre de décision</a:t>
-            </a:r>
-          </a:p>
-        </p:txBody>
-      </p:sp>
-      <p:sp>
-        <p:nvSpPr>
-          <p:cNvPr id="4" name="Rectangle 3"/>
-          <p:cNvSpPr/>
-          <p:nvPr/>
-        </p:nvSpPr>
-        <p:spPr>
-          <a:xfrm>
-            <a:off x="731520" y="1371600"/>
-            <a:ext cx="10728655" cy="960120"/>
-          </a:xfrm>
-          <a:prstGeom prst="rect">
-            <a:avLst/>
-          </a:prstGeom>
-          <a:solidFill>
-            <a:srgbClr val="F4F8F5"/>
-          </a:solidFill>
-          <a:ln>
-            <a:solidFill>
-              <a:srgbClr val="1B7A43"/>
-            </a:solidFill>
-          </a:ln>
-          <a:effectLst/>
-        </p:spPr>
-        <p:style>
-          <a:lnRef idx="1">
-            <a:schemeClr val="accent1"/>
-          </a:lnRef>
-          <a:fillRef idx="3">
-            <a:schemeClr val="accent1"/>
-          </a:fillRef>
-          <a:effectRef idx="2">
-            <a:schemeClr val="accent1"/>
-          </a:effectRef>
-          <a:fontRef idx="minor">
-            <a:schemeClr val="lt1"/>
-          </a:fontRef>
-        </p:style>
-        <p:txBody>
-          <a:bodyPr rtlCol="0" anchor="ctr" wrap="square"/>
-          <a:lstStyle/>
-          <a:p>
-            <a:pPr algn="ctr"/>
-            <a:r>
-              <a:rPr sz="1200">
-                <a:solidFill>
-                  <a:srgbClr val="33403A"/>
-                </a:solidFill>
-                <a:latin typeface="Segoe UI"/>
-              </a:rPr>
-              <a:t>LA PHRASE HONNÊTE QUE VOUS VISEZ — « La radiance nocturne à l'ADM2, VNP46A4 collection 002, seuil d'éclairement
-0,5 nW·cm⁻²·sr⁻¹, corrèle avec notre taux d'électrification officiel à
-r = 0,NN sur NN districts en 20NN. Adaptée au suivi de l'évolution
-relative entre districts ; inadaptée à l'estimation des taux de raccordement en
-niveau. »</a:t>
-            </a:r>
-          </a:p>
-        </p:txBody>
-      </p:sp>
-      <p:sp>
-        <p:nvSpPr>
-          <p:cNvPr id="5" name="TextBox 4"/>
-          <p:cNvSpPr txBox="1"/>
-          <p:nvPr/>
-        </p:nvSpPr>
-        <p:spPr>
-          <a:xfrm>
-            <a:off x="731520" y="2468880"/>
-            <a:ext cx="10728655" cy="640080"/>
-          </a:xfrm>
-          <a:prstGeom prst="rect">
-            <a:avLst/>
-          </a:prstGeom>
-          <a:noFill/>
-        </p:spPr>
-        <p:txBody>
-          <a:bodyPr wrap="square">
-            <a:spAutoFit/>
-          </a:bodyPr>
-          <a:lstStyle/>
-          <a:p>
-            <a:pPr algn="l"/>
-            <a:r>
-              <a:rPr sz="1100" b="0">
-                <a:solidFill>
-                  <a:srgbClr val="6B7B75"/>
-                </a:solidFill>
-                <a:latin typeface="Segoe UI"/>
-              </a:rPr>
-              <a:t>FIGURE — capturez la diapositive 16 du deck HTML et collez-la ici.</a:t>
-            </a:r>
-          </a:p>
-        </p:txBody>
-      </p:sp>
       <p:sp>
         <p:nvSpPr>
           <p:cNvPr id="6" name="TextBox 5"/>
@@ -5376,18 +5066,17 @@
         <p:spPr>
           <a:xfrm>
             <a:off x="0" y="0"/>
-            <a:ext cx="12191695" cy="6858000"/>
+            <a:ext cx="12191695" cy="60000"/>
           </a:xfrm>
           <a:prstGeom prst="rect">
             <a:avLst/>
           </a:prstGeom>
           <a:solidFill>
-            <a:srgbClr val="08090F"/>
+            <a:srgbClr val="F2A900"/>
           </a:solidFill>
           <a:ln>
             <a:noFill/>
           </a:ln>
-          <a:effectLst/>
         </p:spPr>
         <p:style>
           <a:lnRef idx="1">
@@ -5420,7 +5109,7 @@
         <p:spPr>
           <a:xfrm>
             <a:off x="731520" y="502920"/>
-            <a:ext cx="10728655" cy="320040"/>
+            <a:ext cx="10728655" cy="914400"/>
           </a:xfrm>
           <a:prstGeom prst="rect">
             <a:avLst/>
@@ -5435,13 +5124,13 @@
           <a:p>
             <a:pPr algn="l"/>
             <a:r>
-              <a:rPr sz="1100" b="1">
-                <a:solidFill>
-                  <a:srgbClr val="F2A900"/>
-                </a:solidFill>
-                <a:latin typeface="Segoe UI"/>
-              </a:rPr>
-              <a:t>PLACE AUX DONNÉES</a:t>
+              <a:rPr sz="2800" b="1">
+                <a:solidFill>
+                  <a:srgbClr val="0B2545"/>
+                </a:solidFill>
+                <a:latin typeface="Segoe UI"/>
+              </a:rPr>
+              <a:t>Ce que les NTL approchent bien — et ce qu'elles n'approchent pas</a:t>
             </a:r>
           </a:p>
         </p:txBody>
@@ -5454,8 +5143,8 @@
         </p:nvSpPr>
         <p:spPr>
           <a:xfrm>
-            <a:off x="731520" y="914400"/>
-            <a:ext cx="10728655" cy="914400"/>
+            <a:off x="731520" y="1371600"/>
+            <a:ext cx="10728655" cy="4389120"/>
           </a:xfrm>
           <a:prstGeom prst="rect">
             <a:avLst/>
@@ -5468,15 +5157,147 @@
           </a:bodyPr>
           <a:lstStyle/>
           <a:p>
-            <a:pPr algn="l"/>
-            <a:r>
-              <a:rPr sz="2800" b="1">
-                <a:solidFill>
-                  <a:srgbClr val="FFFFFF"/>
-                </a:solidFill>
-                <a:latin typeface="Segoe UI"/>
-              </a:rPr>
-              <a:t>09h30 — Laboratoire 1</a:t>
+            <a:pPr>
+              <a:spcAft>
+                <a:spcPts val="700"/>
+              </a:spcAft>
+            </a:pPr>
+            <a:r>
+              <a:rPr sz="1400">
+                <a:solidFill>
+                  <a:srgbClr val="33403A"/>
+                </a:solidFill>
+                <a:latin typeface="Segoe UI"/>
+              </a:rPr>
+              <a:t>•  Progrès de l'électrification</a:t>
+            </a:r>
+          </a:p>
+          <a:p>
+            <a:pPr>
+              <a:spcAft>
+                <a:spcPts val="700"/>
+              </a:spcAft>
+            </a:pPr>
+            <a:r>
+              <a:rPr sz="1400">
+                <a:solidFill>
+                  <a:srgbClr val="33403A"/>
+                </a:solidFill>
+                <a:latin typeface="Segoe UI"/>
+              </a:rPr>
+              <a:t>•  Urbanisation et croissance des localités</a:t>
+            </a:r>
+          </a:p>
+          <a:p>
+            <a:pPr>
+              <a:spcAft>
+                <a:spcPts val="700"/>
+              </a:spcAft>
+            </a:pPr>
+            <a:r>
+              <a:rPr sz="1400">
+                <a:solidFill>
+                  <a:srgbClr val="33403A"/>
+                </a:solidFill>
+                <a:latin typeface="Segoe UI"/>
+              </a:rPr>
+              <a:t>•  Impact des crises et des conflits</a:t>
+            </a:r>
+          </a:p>
+          <a:p>
+            <a:pPr>
+              <a:spcAft>
+                <a:spcPts val="700"/>
+              </a:spcAft>
+            </a:pPr>
+            <a:r>
+              <a:rPr sz="1400">
+                <a:solidFill>
+                  <a:srgbClr val="33403A"/>
+                </a:solidFill>
+                <a:latin typeface="Segoe UI"/>
+              </a:rPr>
+              <a:t>•  Inégalité spatiale des infrastructures</a:t>
+            </a:r>
+          </a:p>
+          <a:p>
+            <a:pPr>
+              <a:spcAft>
+                <a:spcPts val="700"/>
+              </a:spcAft>
+            </a:pPr>
+            <a:r>
+              <a:rPr sz="1400">
+                <a:solidFill>
+                  <a:srgbClr val="33403A"/>
+                </a:solidFill>
+                <a:latin typeface="Segoe UI"/>
+              </a:rPr>
+              <a:t>•  Comparaison entre districts , même année</a:t>
+            </a:r>
+          </a:p>
+          <a:p>
+            <a:pPr>
+              <a:spcAft>
+                <a:spcPts val="700"/>
+              </a:spcAft>
+            </a:pPr>
+            <a:r>
+              <a:rPr sz="1400">
+                <a:solidFill>
+                  <a:srgbClr val="33403A"/>
+                </a:solidFill>
+                <a:latin typeface="Segoe UI"/>
+              </a:rPr>
+              <a:t>•  Le PIB en niveau</a:t>
+            </a:r>
+          </a:p>
+          <a:p>
+            <a:pPr>
+              <a:spcAft>
+                <a:spcPts val="700"/>
+              </a:spcAft>
+            </a:pPr>
+            <a:r>
+              <a:rPr sz="1400">
+                <a:solidFill>
+                  <a:srgbClr val="33403A"/>
+                </a:solidFill>
+                <a:latin typeface="Segoe UI"/>
+              </a:rPr>
+              <a:t>•  Le taux de raccordement des ménages</a:t>
+            </a:r>
+          </a:p>
+          <a:p>
+            <a:pPr>
+              <a:spcAft>
+                <a:spcPts val="700"/>
+              </a:spcAft>
+            </a:pPr>
+            <a:r>
+              <a:rPr sz="1400">
+                <a:solidFill>
+                  <a:srgbClr val="33403A"/>
+                </a:solidFill>
+                <a:latin typeface="Segoe UI"/>
+              </a:rPr>
+              <a:t>•  L'activité informelle de jour</a:t>
+            </a:r>
+          </a:p>
+          <a:p>
+            <a:pPr>
+              <a:spcAft>
+                <a:spcPts val="700"/>
+              </a:spcAft>
+            </a:pPr>
+            <a:r>
+              <a:rPr sz="1400">
+                <a:solidFill>
+                  <a:srgbClr val="33403A"/>
+                </a:solidFill>
+                <a:latin typeface="Segoe UI"/>
+              </a:rPr>
+              <a:t>•  Toute analyse à l'échelle du village</a:t>
             </a:r>
           </a:p>
         </p:txBody>
@@ -5484,115 +5305,6 @@
       <p:sp>
         <p:nvSpPr>
           <p:cNvPr id="5" name="TextBox 4"/>
-          <p:cNvSpPr txBox="1"/>
-          <p:nvPr/>
-        </p:nvSpPr>
-        <p:spPr>
-          <a:xfrm>
-            <a:off x="731520" y="1783080"/>
-            <a:ext cx="10728655" cy="548640"/>
-          </a:xfrm>
-          <a:prstGeom prst="rect">
-            <a:avLst/>
-          </a:prstGeom>
-          <a:noFill/>
-        </p:spPr>
-        <p:txBody>
-          <a:bodyPr wrap="square">
-            <a:spAutoFit/>
-          </a:bodyPr>
-          <a:lstStyle/>
-          <a:p>
-            <a:pPr algn="l"/>
-            <a:r>
-              <a:rPr sz="1400" b="0">
-                <a:solidFill>
-                  <a:srgbClr val="DBE7E0"/>
-                </a:solidFill>
-                <a:latin typeface="Segoe UI"/>
-              </a:rPr>
-              <a:t>Collecter les granules de votre propre pays, auditer
-leur complétude, charger vos frontières, et découper.</a:t>
-            </a:r>
-          </a:p>
-        </p:txBody>
-      </p:sp>
-      <p:sp>
-        <p:nvSpPr>
-          <p:cNvPr id="6" name="TextBox 5"/>
-          <p:cNvSpPr txBox="1"/>
-          <p:nvPr/>
-        </p:nvSpPr>
-        <p:spPr>
-          <a:xfrm>
-            <a:off x="731520" y="2286000"/>
-            <a:ext cx="10728655" cy="548640"/>
-          </a:xfrm>
-          <a:prstGeom prst="rect">
-            <a:avLst/>
-          </a:prstGeom>
-          <a:noFill/>
-        </p:spPr>
-        <p:txBody>
-          <a:bodyPr wrap="square">
-            <a:spAutoFit/>
-          </a:bodyPr>
-          <a:lstStyle/>
-          <a:p>
-            <a:pPr algn="l"/>
-            <a:r>
-              <a:rPr sz="1400" b="0">
-                <a:solidFill>
-                  <a:srgbClr val="DBE7E0"/>
-                </a:solidFill>
-                <a:latin typeface="Segoe UI"/>
-              </a:rPr>
-              <a:t>Piste guidée ou piste ouverte — à votre
-choix, et vous pouvez basculer. Le livrable est le même dans les deux cas.</a:t>
-            </a:r>
-          </a:p>
-        </p:txBody>
-      </p:sp>
-      <p:sp>
-        <p:nvSpPr>
-          <p:cNvPr id="7" name="TextBox 6"/>
-          <p:cNvSpPr txBox="1"/>
-          <p:nvPr/>
-        </p:nvSpPr>
-        <p:spPr>
-          <a:xfrm>
-            <a:off x="731520" y="2788920"/>
-            <a:ext cx="10728655" cy="548640"/>
-          </a:xfrm>
-          <a:prstGeom prst="rect">
-            <a:avLst/>
-          </a:prstGeom>
-          <a:noFill/>
-        </p:spPr>
-        <p:txBody>
-          <a:bodyPr wrap="square">
-            <a:spAutoFit/>
-          </a:bodyPr>
-          <a:lstStyle/>
-          <a:p>
-            <a:pPr algn="l"/>
-            <a:r>
-              <a:rPr sz="1400" b="0">
-                <a:solidFill>
-                  <a:srgbClr val="DBE7E0"/>
-                </a:solidFill>
-                <a:latin typeface="Segoe UI"/>
-              </a:rPr>
-              <a:t>Pas de jeton Earthdata, pas de réseau, ou un téléchargement qui n'aboutit pas ? 
-Prenez la variante Earth Engine — elle ne télécharge rien. 
-Ou mettez  COUNTRY_ISO3 = "CIV" , le pays de référence, et poursuivez.</a:t>
-            </a:r>
-          </a:p>
-        </p:txBody>
-      </p:sp>
-      <p:sp>
-        <p:nvSpPr>
-          <p:cNvPr id="8" name="TextBox 7"/>
           <p:cNvSpPr txBox="1"/>
           <p:nvPr/>
         </p:nvSpPr>
@@ -5716,7 +5428,7 @@
                 </a:solidFill>
                 <a:latin typeface="Segoe UI"/>
               </a:rPr>
-              <a:t>Références</a:t>
+              <a:t>Ce que vous aurez à 17h00</a:t>
             </a:r>
           </a:p>
         </p:txBody>
@@ -5730,7 +5442,7 @@
         <p:spPr>
           <a:xfrm>
             <a:off x="731520" y="1371600"/>
-            <a:ext cx="10728655" cy="548640"/>
+            <a:ext cx="10728655" cy="457200"/>
           </a:xfrm>
           <a:prstGeom prst="rect">
             <a:avLst/>
@@ -5745,211 +5457,70 @@
           <a:p>
             <a:pPr algn="l"/>
             <a:r>
-              <a:rPr sz="1400" b="0">
+              <a:rPr sz="1500" b="1">
+                <a:solidFill>
+                  <a:srgbClr val="1B7A43"/>
+                </a:solidFill>
+                <a:latin typeface="Segoe UI"/>
+              </a:rPr>
+              <a:t>1  Raster national découpé</a:t>
+            </a:r>
+          </a:p>
+        </p:txBody>
+      </p:sp>
+      <p:sp>
+        <p:nvSpPr>
+          <p:cNvPr id="5" name="Rectangle 4"/>
+          <p:cNvSpPr/>
+          <p:nvPr/>
+        </p:nvSpPr>
+        <p:spPr>
+          <a:xfrm>
+            <a:off x="731520" y="1920240"/>
+            <a:ext cx="10728655" cy="960120"/>
+          </a:xfrm>
+          <a:prstGeom prst="rect">
+            <a:avLst/>
+          </a:prstGeom>
+          <a:solidFill>
+            <a:srgbClr val="F4F8F5"/>
+          </a:solidFill>
+          <a:ln>
+            <a:solidFill>
+              <a:srgbClr val="1B7A43"/>
+            </a:solidFill>
+          </a:ln>
+          <a:effectLst/>
+        </p:spPr>
+        <p:style>
+          <a:lnRef idx="1">
+            <a:schemeClr val="accent1"/>
+          </a:lnRef>
+          <a:fillRef idx="3">
+            <a:schemeClr val="accent1"/>
+          </a:fillRef>
+          <a:effectRef idx="2">
+            <a:schemeClr val="accent1"/>
+          </a:effectRef>
+          <a:fontRef idx="minor">
+            <a:schemeClr val="lt1"/>
+          </a:fontRef>
+        </p:style>
+        <p:txBody>
+          <a:bodyPr rtlCol="0" anchor="ctr" wrap="square"/>
+          <a:lstStyle/>
+          <a:p>
+            <a:pPr algn="ctr"/>
+            <a:r>
+              <a:rPr sz="1200">
                 <a:solidFill>
                   <a:srgbClr val="33403A"/>
                 </a:solidFill>
                 <a:latin typeface="Segoe UI"/>
               </a:rPr>
-              <a:t>Chaque affirmation de cette présentation renvoie à l'une d'elles. Les DOI se
-résolvent sur  doi.org/&lt;doi&gt; .</a:t>
-            </a:r>
-          </a:p>
-        </p:txBody>
-      </p:sp>
-      <p:sp>
-        <p:nvSpPr>
-          <p:cNvPr id="5" name="TextBox 4"/>
-          <p:cNvSpPr txBox="1"/>
-          <p:nvPr/>
-        </p:nvSpPr>
-        <p:spPr>
-          <a:xfrm>
-            <a:off x="731520" y="1874520"/>
-            <a:ext cx="10728655" cy="3886200"/>
-          </a:xfrm>
-          <a:prstGeom prst="rect">
-            <a:avLst/>
-          </a:prstGeom>
-          <a:noFill/>
-        </p:spPr>
-        <p:txBody>
-          <a:bodyPr wrap="square">
-            <a:spAutoFit/>
-          </a:bodyPr>
-          <a:lstStyle/>
-          <a:p>
-            <a:pPr>
-              <a:spcAft>
-                <a:spcPts val="700"/>
-              </a:spcAft>
-            </a:pPr>
-            <a:r>
-              <a:rPr sz="1400">
-                <a:solidFill>
-                  <a:srgbClr val="33403A"/>
-                </a:solidFill>
-                <a:latin typeface="Segoe UI"/>
-              </a:rPr>
-              <a:t>•  Román, M.O., et al.  (2018). NASA's Black Marble nighttime lights product
-suite.  Remote Sensing of Environment , 210, 113–143.
- 10.1016/j.rse.2018.03.017  
- La suite VNP46 — à lire avant d'utiliser VNP46A2/A3/A4.</a:t>
-            </a:r>
-          </a:p>
-          <a:p>
-            <a:pPr>
-              <a:spcAft>
-                <a:spcPts val="700"/>
-              </a:spcAft>
-            </a:pPr>
-            <a:r>
-              <a:rPr sz="1400">
-                <a:solidFill>
-                  <a:srgbClr val="33403A"/>
-                </a:solidFill>
-                <a:latin typeface="Segoe UI"/>
-              </a:rPr>
-              <a:t>•  Elvidge, C.D., Zhizhin, M., Ghosh, T., Hsu, F.-C., Taneja, J.  (2021).
-Annual Time Series of Global VIIRS Nighttime Lights Derived from Monthly Averages:
-2012 to 2019.  Remote Sensing , 13(5), 922.
- 10.3390/rs13050922  
- La série annuelle VNL v2 de l'EOG — le produit derrière la variante Earth Engine.</a:t>
-            </a:r>
-          </a:p>
-          <a:p>
-            <a:pPr>
-              <a:spcAft>
-                <a:spcPts val="700"/>
-              </a:spcAft>
-            </a:pPr>
-            <a:r>
-              <a:rPr sz="1400">
-                <a:solidFill>
-                  <a:srgbClr val="33403A"/>
-                </a:solidFill>
-                <a:latin typeface="Segoe UI"/>
-              </a:rPr>
-              <a:t>•  Levin, N., et al.  (2020). Remote sensing of night lights: A review and an
-outlook for the future.  Remote Sensing of Environment , 237, 111443.
- 10.1016/j.rse.2019.111443  
- Le meilleur point de départ si vous ne lisez qu'un seul article.</a:t>
-            </a:r>
-          </a:p>
-          <a:p>
-            <a:pPr>
-              <a:spcAft>
-                <a:spcPts val="700"/>
-              </a:spcAft>
-            </a:pPr>
-            <a:r>
-              <a:rPr sz="1400">
-                <a:solidFill>
-                  <a:srgbClr val="33403A"/>
-                </a:solidFill>
-                <a:latin typeface="Segoe UI"/>
-              </a:rPr>
-              <a:t>•  Henderson, J.V., Storeygard, A., Weil, D.N.  (2012). Measuring Economic
-Growth from Outer Space.  American Economic Review , 102(2), 994–1028.
- 10.1257/aer.102.2.994  
- L'argument fondateur des lumières comme complément à des comptes nationaux fragiles.</a:t>
-            </a:r>
-          </a:p>
-          <a:p>
-            <a:pPr>
-              <a:spcAft>
-                <a:spcPts val="700"/>
-              </a:spcAft>
-            </a:pPr>
-            <a:r>
-              <a:rPr sz="1400">
-                <a:solidFill>
-                  <a:srgbClr val="33403A"/>
-                </a:solidFill>
-                <a:latin typeface="Segoe UI"/>
-              </a:rPr>
-              <a:t>•  Gibson, J., Olivia, S., Boe-Gibson, G.  (2020). Night Lights in Economics:
-Sources and Uses.  Journal of Economic Surveys , 34(5), 955–980. 
- Une revue critique. À lire avec Henderson et al., pas à sa place.</a:t>
-            </a:r>
-          </a:p>
-          <a:p>
-            <a:pPr>
-              <a:spcAft>
-                <a:spcPts val="700"/>
-              </a:spcAft>
-            </a:pPr>
-            <a:r>
-              <a:rPr sz="1400">
-                <a:solidFill>
-                  <a:srgbClr val="33403A"/>
-                </a:solidFill>
-                <a:latin typeface="Segoe UI"/>
-              </a:rPr>
-              <a:t>•  Gibson, J., Olivia, S., Boe-Gibson, G., Li, C.  (2021). Which night lights
-data should we use in economics, and where?  Journal of Development Economics ,
-149, 102602.  10.1016/j.jdeveco.2020.102602  
- Pourquoi nommer son produit et sa version n'est pas du pédantisme.</a:t>
-            </a:r>
-          </a:p>
-          <a:p>
-            <a:pPr>
-              <a:spcAft>
-                <a:spcPts val="700"/>
-              </a:spcAft>
-            </a:pPr>
-            <a:r>
-              <a:rPr sz="1400">
-                <a:solidFill>
-                  <a:srgbClr val="33403A"/>
-                </a:solidFill>
-                <a:latin typeface="Segoe UI"/>
-              </a:rPr>
-              <a:t>•  Bluhm, R., Krause, M.  (2022). Top lights: Bright cities and their
-contribution to economic development.  Journal of Development Economics , 157,
-102880.  10.1016/j.jdeveco.2022.102880  
- La correction de saturation inverse le résultat villes primaires / secondaires
-en Afrique subsaharienne.</a:t>
-            </a:r>
-          </a:p>
-          <a:p>
-            <a:pPr>
-              <a:spcAft>
-                <a:spcPts val="700"/>
-              </a:spcAft>
-            </a:pPr>
-            <a:r>
-              <a:rPr sz="1400">
-                <a:solidFill>
-                  <a:srgbClr val="33403A"/>
-                </a:solidFill>
-                <a:latin typeface="Segoe UI"/>
-              </a:rPr>
-              <a:t>•  Min, B., Gaba, K.M., Sarr, O.F., Agalassou, A.  (2013). Detection of rural
-electrification in Africa using DMSP-OLS night lights imagery.  International
-Journal of Remote Sensing , 34(22), 8118–8141.
- 10.1080/01431161.2013.833358  
- Sénégal et Mali, validés contre des relevés de terrain. La référence africaine.</a:t>
-            </a:r>
-          </a:p>
-          <a:p>
-            <a:pPr>
-              <a:spcAft>
-                <a:spcPts val="700"/>
-              </a:spcAft>
-            </a:pPr>
-            <a:r>
-              <a:rPr sz="1400">
-                <a:solidFill>
-                  <a:srgbClr val="33403A"/>
-                </a:solidFill>
-                <a:latin typeface="Segoe UI"/>
-              </a:rPr>
-              <a:t>•  Elvidge, C.D., Zhizhin, M., Baugh, K., Hsu, F.-C., Ghosh, T.  (2016).
-Methods for Global Survey of Natural Gas Flaring from Visible Infrared Imaging
-Radiometer Suite Data.  Energies , 9(1), 14.
- 10.3390/en9010014  
- Comment les torchères sont détectées — donc comment les masquer de vos totaux.</a:t>
+              <a:t>UNE SEULE VARIABLE COMMANDE LE TOUT — COUNTRY_ISO3 = "CIV"  
+Frontières, tuiles satellitaires, projection, emprise et titres de figures en
+découlent — pour les 55 États membres de l'Union africaine.</a:t>
             </a:r>
           </a:p>
         </p:txBody>
@@ -6016,18 +5587,17 @@
         <p:spPr>
           <a:xfrm>
             <a:off x="0" y="0"/>
-            <a:ext cx="12191695" cy="6858000"/>
+            <a:ext cx="12191695" cy="60000"/>
           </a:xfrm>
           <a:prstGeom prst="rect">
             <a:avLst/>
           </a:prstGeom>
           <a:solidFill>
-            <a:srgbClr val="0B2545"/>
+            <a:srgbClr val="F2A900"/>
           </a:solidFill>
           <a:ln>
             <a:noFill/>
           </a:ln>
-          <a:effectLst/>
         </p:spPr>
         <p:style>
           <a:lnRef idx="1">
@@ -6059,8 +5629,8 @@
         </p:nvSpPr>
         <p:spPr>
           <a:xfrm>
-            <a:off x="1097280" y="2377440"/>
-            <a:ext cx="9997135" cy="2286000"/>
+            <a:off x="731520" y="502920"/>
+            <a:ext cx="10728655" cy="914400"/>
           </a:xfrm>
           <a:prstGeom prst="rect">
             <a:avLst/>
@@ -6073,18 +5643,144 @@
           </a:bodyPr>
           <a:lstStyle/>
           <a:p>
+            <a:pPr algn="l"/>
+            <a:r>
+              <a:rPr sz="2800" b="1">
+                <a:solidFill>
+                  <a:srgbClr val="0B2545"/>
+                </a:solidFill>
+                <a:latin typeface="Segoe UI"/>
+              </a:rPr>
+              <a:t>Mon indicateur est-il publiable ? Un cadre de décision</a:t>
+            </a:r>
+          </a:p>
+        </p:txBody>
+      </p:sp>
+      <p:sp>
+        <p:nvSpPr>
+          <p:cNvPr id="4" name="Rectangle 3"/>
+          <p:cNvSpPr/>
+          <p:nvPr/>
+        </p:nvSpPr>
+        <p:spPr>
+          <a:xfrm>
+            <a:off x="731520" y="1371600"/>
+            <a:ext cx="10728655" cy="960120"/>
+          </a:xfrm>
+          <a:prstGeom prst="rect">
+            <a:avLst/>
+          </a:prstGeom>
+          <a:solidFill>
+            <a:srgbClr val="F4F8F5"/>
+          </a:solidFill>
+          <a:ln>
+            <a:solidFill>
+              <a:srgbClr val="1B7A43"/>
+            </a:solidFill>
+          </a:ln>
+          <a:effectLst/>
+        </p:spPr>
+        <p:style>
+          <a:lnRef idx="1">
+            <a:schemeClr val="accent1"/>
+          </a:lnRef>
+          <a:fillRef idx="3">
+            <a:schemeClr val="accent1"/>
+          </a:fillRef>
+          <a:effectRef idx="2">
+            <a:schemeClr val="accent1"/>
+          </a:effectRef>
+          <a:fontRef idx="minor">
+            <a:schemeClr val="lt1"/>
+          </a:fontRef>
+        </p:style>
+        <p:txBody>
+          <a:bodyPr rtlCol="0" anchor="ctr" wrap="square"/>
+          <a:lstStyle/>
+          <a:p>
             <a:pPr algn="ctr"/>
             <a:r>
-              <a:rPr sz="1400" b="0">
-                <a:solidFill>
-                  <a:srgbClr val="DBE7E0"/>
-                </a:solidFill>
-                <a:latin typeface="Segoe UI"/>
-              </a:rPr>
-              <a:t>Ce fichier PowerPoint est généré à partir du deck reveal.js
-slides/decks/08-ntl-what-darkness-tells-us.deck.html
-Les modifications faites ici ne remontent pas. Si votre changement doit être permanent,
-modifiez la source et exécutez :  python tools/build_slides.py &amp;&amp; python tools/build_pptx.py</a:t>
+              <a:rPr sz="1200">
+                <a:solidFill>
+                  <a:srgbClr val="33403A"/>
+                </a:solidFill>
+                <a:latin typeface="Segoe UI"/>
+              </a:rPr>
+              <a:t>LA PHRASE HONNÊTE QUE VOUS VISEZ — « La radiance nocturne à l'ADM2, VNP46A4 collection 002, seuil d'éclairement
+0,5 nW·cm⁻²·sr⁻¹, corrèle avec notre taux d'électrification officiel à
+r = 0,NN sur NN districts en 20NN. Adaptée au suivi de l'évolution
+relative entre districts ; inadaptée à l'estimation des taux de raccordement en
+niveau. »</a:t>
+            </a:r>
+          </a:p>
+        </p:txBody>
+      </p:sp>
+      <p:sp>
+        <p:nvSpPr>
+          <p:cNvPr id="5" name="TextBox 4"/>
+          <p:cNvSpPr txBox="1"/>
+          <p:nvPr/>
+        </p:nvSpPr>
+        <p:spPr>
+          <a:xfrm>
+            <a:off x="731520" y="2468880"/>
+            <a:ext cx="10728655" cy="640080"/>
+          </a:xfrm>
+          <a:prstGeom prst="rect">
+            <a:avLst/>
+          </a:prstGeom>
+          <a:noFill/>
+        </p:spPr>
+        <p:txBody>
+          <a:bodyPr wrap="square">
+            <a:spAutoFit/>
+          </a:bodyPr>
+          <a:lstStyle/>
+          <a:p>
+            <a:pPr algn="l"/>
+            <a:r>
+              <a:rPr sz="1100" b="0">
+                <a:solidFill>
+                  <a:srgbClr val="6B7B75"/>
+                </a:solidFill>
+                <a:latin typeface="Segoe UI"/>
+              </a:rPr>
+              <a:t>FIGURE — capturez la diapositive 19 du deck HTML et collez-la ici.</a:t>
+            </a:r>
+          </a:p>
+        </p:txBody>
+      </p:sp>
+      <p:sp>
+        <p:nvSpPr>
+          <p:cNvPr id="6" name="TextBox 5"/>
+          <p:cNvSpPr txBox="1"/>
+          <p:nvPr/>
+        </p:nvSpPr>
+        <p:spPr>
+          <a:xfrm>
+            <a:off x="731520" y="6400800"/>
+            <a:ext cx="10728655" cy="274320"/>
+          </a:xfrm>
+          <a:prstGeom prst="rect">
+            <a:avLst/>
+          </a:prstGeom>
+          <a:noFill/>
+        </p:spPr>
+        <p:txBody>
+          <a:bodyPr wrap="square">
+            <a:spAutoFit/>
+          </a:bodyPr>
+          <a:lstStyle/>
+          <a:p>
+            <a:pPr algn="l"/>
+            <a:r>
+              <a:rPr sz="900" b="0">
+                <a:solidFill>
+                  <a:srgbClr val="6B7B75"/>
+                </a:solidFill>
+                <a:latin typeface="Segoe UI"/>
+              </a:rPr>
+              <a:t>Banque africaine de développement · UA STATAFRIC · STG17</a:t>
             </a:r>
           </a:p>
         </p:txBody>
@@ -6180,7 +5876,7 @@
                 </a:solidFill>
                 <a:latin typeface="Segoe UI"/>
               </a:rPr>
-              <a:t>Pourquoi un office statistique devrait s'y intéresser</a:t>
+              <a:t>Le manque dont parle cette journée</a:t>
             </a:r>
           </a:p>
         </p:txBody>
@@ -6215,9 +5911,8 @@
                 </a:solidFill>
                 <a:latin typeface="Segoe UI"/>
               </a:rPr>
-              <a:t>Entre deux recensements, la plupart des offices statistiques africains n'ont
-aucune mesure de l'activité économique à la fois  infranationale ,
- annuelle  et  comparable .</a:t>
+              <a:t>Les lumières nocturnes ne comblent pas ce manque. Mais elles sont le seul signal
+gratuit, continental et infranational qui s'actualise chaque année.</a:t>
             </a:r>
           </a:p>
         </p:txBody>
@@ -6231,7 +5926,7 @@
         <p:spPr>
           <a:xfrm>
             <a:off x="731520" y="1874520"/>
-            <a:ext cx="10728655" cy="548640"/>
+            <a:ext cx="10728655" cy="457200"/>
           </a:xfrm>
           <a:prstGeom prst="rect">
             <a:avLst/>
@@ -6246,13 +5941,13 @@
           <a:p>
             <a:pPr algn="l"/>
             <a:r>
-              <a:rPr sz="1400" b="0">
-                <a:solidFill>
-                  <a:srgbClr val="33403A"/>
-                </a:solidFill>
-                <a:latin typeface="Segoe UI"/>
-              </a:rPr>
-              <a:t>Les lumières nocturnes ne sont par nature aucune de ces choses. Mais elles sont :</a:t>
+              <a:rPr sz="1500" b="1">
+                <a:solidFill>
+                  <a:srgbClr val="1B7A43"/>
+                </a:solidFill>
+                <a:latin typeface="Segoe UI"/>
+              </a:rPr>
+              <a:t>2012→  Série continue VIIRS</a:t>
             </a:r>
           </a:p>
         </p:txBody>
@@ -6265,8 +5960,8 @@
         </p:nvSpPr>
         <p:spPr>
           <a:xfrm>
-            <a:off x="731520" y="2377440"/>
-            <a:ext cx="10728655" cy="457200"/>
+            <a:off x="731520" y="6400800"/>
+            <a:ext cx="10728655" cy="274320"/>
           </a:xfrm>
           <a:prstGeom prst="rect">
             <a:avLst/>
@@ -6281,13 +5976,217 @@
           <a:p>
             <a:pPr algn="l"/>
             <a:r>
-              <a:rPr sz="1500" b="1">
-                <a:solidFill>
-                  <a:srgbClr val="1B7A43"/>
-                </a:solidFill>
-                <a:latin typeface="Segoe UI"/>
-              </a:rPr>
-              <a:t>2012→  Série continue VIIRS</a:t>
+              <a:rPr sz="900" b="0">
+                <a:solidFill>
+                  <a:srgbClr val="6B7B75"/>
+                </a:solidFill>
+                <a:latin typeface="Segoe UI"/>
+              </a:rPr>
+              <a:t>Banque africaine de développement · UA STATAFRIC · STG17</a:t>
+            </a:r>
+          </a:p>
+        </p:txBody>
+      </p:sp>
+    </p:spTree>
+  </p:cSld>
+  <p:clrMapOvr>
+    <a:masterClrMapping/>
+  </p:clrMapOvr>
+</p:sld>
+</file>
+
+<file path=ppt/slides/slide20.xml><?xml version="1.0" encoding="utf-8"?>
+<p:sld xmlns:a="http://schemas.openxmlformats.org/drawingml/2006/main" xmlns:p="http://schemas.openxmlformats.org/presentationml/2006/main" xmlns:r="http://schemas.openxmlformats.org/officeDocument/2006/relationships">
+  <p:cSld>
+    <p:spTree>
+      <p:nvGrpSpPr>
+        <p:cNvPr id="1" name=""/>
+        <p:cNvGrpSpPr/>
+        <p:nvPr/>
+      </p:nvGrpSpPr>
+      <p:grpSpPr/>
+      <p:sp>
+        <p:nvSpPr>
+          <p:cNvPr id="2" name="Rectangle 1"/>
+          <p:cNvSpPr/>
+          <p:nvPr/>
+        </p:nvSpPr>
+        <p:spPr>
+          <a:xfrm>
+            <a:off x="0" y="0"/>
+            <a:ext cx="12191695" cy="6858000"/>
+          </a:xfrm>
+          <a:prstGeom prst="rect">
+            <a:avLst/>
+          </a:prstGeom>
+          <a:solidFill>
+            <a:srgbClr val="08090F"/>
+          </a:solidFill>
+          <a:ln>
+            <a:noFill/>
+          </a:ln>
+          <a:effectLst/>
+        </p:spPr>
+        <p:style>
+          <a:lnRef idx="1">
+            <a:schemeClr val="accent1"/>
+          </a:lnRef>
+          <a:fillRef idx="3">
+            <a:schemeClr val="accent1"/>
+          </a:fillRef>
+          <a:effectRef idx="2">
+            <a:schemeClr val="accent1"/>
+          </a:effectRef>
+          <a:fontRef idx="minor">
+            <a:schemeClr val="lt1"/>
+          </a:fontRef>
+        </p:style>
+        <p:txBody>
+          <a:bodyPr rtlCol="0" anchor="ctr"/>
+          <a:lstStyle/>
+          <a:p>
+            <a:pPr algn="ctr"/>
+          </a:p>
+        </p:txBody>
+      </p:sp>
+      <p:sp>
+        <p:nvSpPr>
+          <p:cNvPr id="3" name="TextBox 2"/>
+          <p:cNvSpPr txBox="1"/>
+          <p:nvPr/>
+        </p:nvSpPr>
+        <p:spPr>
+          <a:xfrm>
+            <a:off x="731520" y="502920"/>
+            <a:ext cx="10728655" cy="320040"/>
+          </a:xfrm>
+          <a:prstGeom prst="rect">
+            <a:avLst/>
+          </a:prstGeom>
+          <a:noFill/>
+        </p:spPr>
+        <p:txBody>
+          <a:bodyPr wrap="square">
+            <a:spAutoFit/>
+          </a:bodyPr>
+          <a:lstStyle/>
+          <a:p>
+            <a:pPr algn="l"/>
+            <a:r>
+              <a:rPr sz="1100" b="1">
+                <a:solidFill>
+                  <a:srgbClr val="F2A900"/>
+                </a:solidFill>
+                <a:latin typeface="Segoe UI"/>
+              </a:rPr>
+              <a:t>PLACE AUX DONNÉES</a:t>
+            </a:r>
+          </a:p>
+        </p:txBody>
+      </p:sp>
+      <p:sp>
+        <p:nvSpPr>
+          <p:cNvPr id="4" name="TextBox 3"/>
+          <p:cNvSpPr txBox="1"/>
+          <p:nvPr/>
+        </p:nvSpPr>
+        <p:spPr>
+          <a:xfrm>
+            <a:off x="731520" y="914400"/>
+            <a:ext cx="10728655" cy="914400"/>
+          </a:xfrm>
+          <a:prstGeom prst="rect">
+            <a:avLst/>
+          </a:prstGeom>
+          <a:noFill/>
+        </p:spPr>
+        <p:txBody>
+          <a:bodyPr wrap="square">
+            <a:spAutoFit/>
+          </a:bodyPr>
+          <a:lstStyle/>
+          <a:p>
+            <a:pPr algn="l"/>
+            <a:r>
+              <a:rPr sz="2800" b="1">
+                <a:solidFill>
+                  <a:srgbClr val="FFFFFF"/>
+                </a:solidFill>
+                <a:latin typeface="Segoe UI"/>
+              </a:rPr>
+              <a:t>09h30 — Laboratoire 1</a:t>
+            </a:r>
+          </a:p>
+        </p:txBody>
+      </p:sp>
+      <p:sp>
+        <p:nvSpPr>
+          <p:cNvPr id="5" name="TextBox 4"/>
+          <p:cNvSpPr txBox="1"/>
+          <p:nvPr/>
+        </p:nvSpPr>
+        <p:spPr>
+          <a:xfrm>
+            <a:off x="731520" y="1783080"/>
+            <a:ext cx="10728655" cy="548640"/>
+          </a:xfrm>
+          <a:prstGeom prst="rect">
+            <a:avLst/>
+          </a:prstGeom>
+          <a:noFill/>
+        </p:spPr>
+        <p:txBody>
+          <a:bodyPr wrap="square">
+            <a:spAutoFit/>
+          </a:bodyPr>
+          <a:lstStyle/>
+          <a:p>
+            <a:pPr algn="l"/>
+            <a:r>
+              <a:rPr sz="1400" b="0">
+                <a:solidFill>
+                  <a:srgbClr val="DBE7E0"/>
+                </a:solidFill>
+                <a:latin typeface="Segoe UI"/>
+              </a:rPr>
+              <a:t>Collecter les granules de votre propre pays, auditer
+leur complétude, charger vos frontières, et découper.</a:t>
+            </a:r>
+          </a:p>
+        </p:txBody>
+      </p:sp>
+      <p:sp>
+        <p:nvSpPr>
+          <p:cNvPr id="6" name="TextBox 5"/>
+          <p:cNvSpPr txBox="1"/>
+          <p:nvPr/>
+        </p:nvSpPr>
+        <p:spPr>
+          <a:xfrm>
+            <a:off x="731520" y="2286000"/>
+            <a:ext cx="10728655" cy="548640"/>
+          </a:xfrm>
+          <a:prstGeom prst="rect">
+            <a:avLst/>
+          </a:prstGeom>
+          <a:noFill/>
+        </p:spPr>
+        <p:txBody>
+          <a:bodyPr wrap="square">
+            <a:spAutoFit/>
+          </a:bodyPr>
+          <a:lstStyle/>
+          <a:p>
+            <a:pPr algn="l"/>
+            <a:r>
+              <a:rPr sz="1400" b="0">
+                <a:solidFill>
+                  <a:srgbClr val="DBE7E0"/>
+                </a:solidFill>
+                <a:latin typeface="Segoe UI"/>
+              </a:rPr>
+              <a:t>Piste guidée ou piste ouverte — à votre
+choix, et vous pouvez basculer. Le livrable est le même dans les deux cas.</a:t>
             </a:r>
           </a:p>
         </p:txBody>
@@ -6300,8 +6199,212 @@
         </p:nvSpPr>
         <p:spPr>
           <a:xfrm>
-            <a:off x="731520" y="2926080"/>
-            <a:ext cx="10728655" cy="2834640"/>
+            <a:off x="731520" y="2788920"/>
+            <a:ext cx="10728655" cy="548640"/>
+          </a:xfrm>
+          <a:prstGeom prst="rect">
+            <a:avLst/>
+          </a:prstGeom>
+          <a:noFill/>
+        </p:spPr>
+        <p:txBody>
+          <a:bodyPr wrap="square">
+            <a:spAutoFit/>
+          </a:bodyPr>
+          <a:lstStyle/>
+          <a:p>
+            <a:pPr algn="l"/>
+            <a:r>
+              <a:rPr sz="1400" b="0">
+                <a:solidFill>
+                  <a:srgbClr val="DBE7E0"/>
+                </a:solidFill>
+                <a:latin typeface="Segoe UI"/>
+              </a:rPr>
+              <a:t>Pas de jeton Earthdata, pas de réseau, ou un téléchargement qui n'aboutit pas ? 
+Prenez la variante Earth Engine — elle ne télécharge rien. 
+Ou mettez  COUNTRY_ISO3 = "CIV" , le pays de référence, et poursuivez.</a:t>
+            </a:r>
+          </a:p>
+        </p:txBody>
+      </p:sp>
+      <p:sp>
+        <p:nvSpPr>
+          <p:cNvPr id="8" name="TextBox 7"/>
+          <p:cNvSpPr txBox="1"/>
+          <p:nvPr/>
+        </p:nvSpPr>
+        <p:spPr>
+          <a:xfrm>
+            <a:off x="731520" y="6400800"/>
+            <a:ext cx="10728655" cy="274320"/>
+          </a:xfrm>
+          <a:prstGeom prst="rect">
+            <a:avLst/>
+          </a:prstGeom>
+          <a:noFill/>
+        </p:spPr>
+        <p:txBody>
+          <a:bodyPr wrap="square">
+            <a:spAutoFit/>
+          </a:bodyPr>
+          <a:lstStyle/>
+          <a:p>
+            <a:pPr algn="l"/>
+            <a:r>
+              <a:rPr sz="900" b="0">
+                <a:solidFill>
+                  <a:srgbClr val="6B7B75"/>
+                </a:solidFill>
+                <a:latin typeface="Segoe UI"/>
+              </a:rPr>
+              <a:t>Banque africaine de développement · UA STATAFRIC · STG17</a:t>
+            </a:r>
+          </a:p>
+        </p:txBody>
+      </p:sp>
+    </p:spTree>
+  </p:cSld>
+  <p:clrMapOvr>
+    <a:masterClrMapping/>
+  </p:clrMapOvr>
+</p:sld>
+</file>
+
+<file path=ppt/slides/slide21.xml><?xml version="1.0" encoding="utf-8"?>
+<p:sld xmlns:a="http://schemas.openxmlformats.org/drawingml/2006/main" xmlns:p="http://schemas.openxmlformats.org/presentationml/2006/main" xmlns:r="http://schemas.openxmlformats.org/officeDocument/2006/relationships">
+  <p:cSld>
+    <p:spTree>
+      <p:nvGrpSpPr>
+        <p:cNvPr id="1" name=""/>
+        <p:cNvGrpSpPr/>
+        <p:nvPr/>
+      </p:nvGrpSpPr>
+      <p:grpSpPr/>
+      <p:sp>
+        <p:nvSpPr>
+          <p:cNvPr id="2" name="Rectangle 1"/>
+          <p:cNvSpPr/>
+          <p:nvPr/>
+        </p:nvSpPr>
+        <p:spPr>
+          <a:xfrm>
+            <a:off x="0" y="0"/>
+            <a:ext cx="12191695" cy="60000"/>
+          </a:xfrm>
+          <a:prstGeom prst="rect">
+            <a:avLst/>
+          </a:prstGeom>
+          <a:solidFill>
+            <a:srgbClr val="F2A900"/>
+          </a:solidFill>
+          <a:ln>
+            <a:noFill/>
+          </a:ln>
+        </p:spPr>
+        <p:style>
+          <a:lnRef idx="1">
+            <a:schemeClr val="accent1"/>
+          </a:lnRef>
+          <a:fillRef idx="3">
+            <a:schemeClr val="accent1"/>
+          </a:fillRef>
+          <a:effectRef idx="2">
+            <a:schemeClr val="accent1"/>
+          </a:effectRef>
+          <a:fontRef idx="minor">
+            <a:schemeClr val="lt1"/>
+          </a:fontRef>
+        </p:style>
+        <p:txBody>
+          <a:bodyPr rtlCol="0" anchor="ctr"/>
+          <a:lstStyle/>
+          <a:p>
+            <a:pPr algn="ctr"/>
+          </a:p>
+        </p:txBody>
+      </p:sp>
+      <p:sp>
+        <p:nvSpPr>
+          <p:cNvPr id="3" name="TextBox 2"/>
+          <p:cNvSpPr txBox="1"/>
+          <p:nvPr/>
+        </p:nvSpPr>
+        <p:spPr>
+          <a:xfrm>
+            <a:off x="731520" y="502920"/>
+            <a:ext cx="10728655" cy="914400"/>
+          </a:xfrm>
+          <a:prstGeom prst="rect">
+            <a:avLst/>
+          </a:prstGeom>
+          <a:noFill/>
+        </p:spPr>
+        <p:txBody>
+          <a:bodyPr wrap="square">
+            <a:spAutoFit/>
+          </a:bodyPr>
+          <a:lstStyle/>
+          <a:p>
+            <a:pPr algn="l"/>
+            <a:r>
+              <a:rPr sz="2800" b="1">
+                <a:solidFill>
+                  <a:srgbClr val="0B2545"/>
+                </a:solidFill>
+                <a:latin typeface="Segoe UI"/>
+              </a:rPr>
+              <a:t>Références</a:t>
+            </a:r>
+          </a:p>
+        </p:txBody>
+      </p:sp>
+      <p:sp>
+        <p:nvSpPr>
+          <p:cNvPr id="4" name="TextBox 3"/>
+          <p:cNvSpPr txBox="1"/>
+          <p:nvPr/>
+        </p:nvSpPr>
+        <p:spPr>
+          <a:xfrm>
+            <a:off x="731520" y="1371600"/>
+            <a:ext cx="10728655" cy="548640"/>
+          </a:xfrm>
+          <a:prstGeom prst="rect">
+            <a:avLst/>
+          </a:prstGeom>
+          <a:noFill/>
+        </p:spPr>
+        <p:txBody>
+          <a:bodyPr wrap="square">
+            <a:spAutoFit/>
+          </a:bodyPr>
+          <a:lstStyle/>
+          <a:p>
+            <a:pPr algn="l"/>
+            <a:r>
+              <a:rPr sz="1400" b="0">
+                <a:solidFill>
+                  <a:srgbClr val="33403A"/>
+                </a:solidFill>
+                <a:latin typeface="Segoe UI"/>
+              </a:rPr>
+              <a:t>Chaque affirmation de cette présentation renvoie à l'une d'elles. Les DOI se
+résolvent sur  doi.org/&lt;doi&gt; .</a:t>
+            </a:r>
+          </a:p>
+        </p:txBody>
+      </p:sp>
+      <p:sp>
+        <p:nvSpPr>
+          <p:cNvPr id="5" name="TextBox 4"/>
+          <p:cNvSpPr txBox="1"/>
+          <p:nvPr/>
+        </p:nvSpPr>
+        <p:spPr>
+          <a:xfrm>
+            <a:off x="731520" y="1874520"/>
+            <a:ext cx="10728655" cy="3886200"/>
           </a:xfrm>
           <a:prstGeom prst="rect">
             <a:avLst/>
@@ -6326,7 +6429,10 @@
                 </a:solidFill>
                 <a:latin typeface="Segoe UI"/>
               </a:rPr>
-              <a:t>•  Disponibles  — chaque nuit, depuis 2012, gratuitement</a:t>
+              <a:t>•  Román, M.O., et al.  (2018). NASA's Black Marble nighttime lights product
+suite.  Remote Sensing of Environment , 210, 113–143.
+ 10.1016/j.rse.2018.03.017  
+ La suite VNP46 — à lire avant d'utiliser VNP46A2/A3/A4.</a:t>
             </a:r>
           </a:p>
           <a:p>
@@ -6342,7 +6448,11 @@
                 </a:solidFill>
                 <a:latin typeface="Segoe UI"/>
               </a:rPr>
-              <a:t>•  Cohérentes  — le même capteur sur tout le continent</a:t>
+              <a:t>•  Elvidge, C.D., Zhizhin, M., Ghosh, T., Hsu, F.-C., Taneja, J.  (2021).
+Annual Time Series of Global VIIRS Nighttime Lights Derived from Monthly Averages:
+2012 to 2019.  Remote Sensing , 13(5), 922.
+ 10.3390/rs13050922  
+ La série annuelle VNL v2 de l'EOG — le produit derrière la variante Earth Engine.</a:t>
             </a:r>
           </a:p>
           <a:p>
@@ -6358,7 +6468,10 @@
                 </a:solidFill>
                 <a:latin typeface="Segoe UI"/>
               </a:rPr>
-              <a:t>•  Fines  — environ 500 m, donc le niveau district est possible</a:t>
+              <a:t>•  Levin, N., et al.  (2020). Remote sensing of night lights: A review and an
+outlook for the future.  Remote Sensing of Environment , 237, 111443.
+ 10.1016/j.rse.2019.111443  
+ Le meilleur point de départ si vous ne lisez qu'un seul article.</a:t>
             </a:r>
           </a:p>
           <a:p>
@@ -6374,32 +6487,183 @@
                 </a:solidFill>
                 <a:latin typeface="Segoe UI"/>
               </a:rPr>
-              <a:t>•  Indépendantes  — non dérivées des statistiques que vous cherchez à contrôler</a:t>
-            </a:r>
-          </a:p>
-        </p:txBody>
-      </p:sp>
-      <p:sp>
-        <p:nvSpPr>
-          <p:cNvPr id="8" name="Rectangle 7"/>
+              <a:t>•  Henderson, J.V., Storeygard, A., Weil, D.N.  (2012). Measuring Economic
+Growth from Outer Space.  American Economic Review , 102(2), 994–1028.
+ 10.1257/aer.102.2.994  
+ L'argument fondateur des lumières comme complément à des comptes nationaux fragiles.</a:t>
+            </a:r>
+          </a:p>
+          <a:p>
+            <a:pPr>
+              <a:spcAft>
+                <a:spcPts val="700"/>
+              </a:spcAft>
+            </a:pPr>
+            <a:r>
+              <a:rPr sz="1400">
+                <a:solidFill>
+                  <a:srgbClr val="33403A"/>
+                </a:solidFill>
+                <a:latin typeface="Segoe UI"/>
+              </a:rPr>
+              <a:t>•  Gibson, J., Olivia, S., Boe-Gibson, G.  (2020). Night Lights in Economics:
+Sources and Uses.  Journal of Economic Surveys , 34(5), 955–980. 
+ Une revue critique. À lire avec Henderson et al., pas à sa place.</a:t>
+            </a:r>
+          </a:p>
+          <a:p>
+            <a:pPr>
+              <a:spcAft>
+                <a:spcPts val="700"/>
+              </a:spcAft>
+            </a:pPr>
+            <a:r>
+              <a:rPr sz="1400">
+                <a:solidFill>
+                  <a:srgbClr val="33403A"/>
+                </a:solidFill>
+                <a:latin typeface="Segoe UI"/>
+              </a:rPr>
+              <a:t>•  Gibson, J., Olivia, S., Boe-Gibson, G., Li, C.  (2021). Which night lights
+data should we use in economics, and where?  Journal of Development Economics ,
+149, 102602.  10.1016/j.jdeveco.2020.102602  
+ Pourquoi nommer son produit et sa version n'est pas du pédantisme.</a:t>
+            </a:r>
+          </a:p>
+          <a:p>
+            <a:pPr>
+              <a:spcAft>
+                <a:spcPts val="700"/>
+              </a:spcAft>
+            </a:pPr>
+            <a:r>
+              <a:rPr sz="1400">
+                <a:solidFill>
+                  <a:srgbClr val="33403A"/>
+                </a:solidFill>
+                <a:latin typeface="Segoe UI"/>
+              </a:rPr>
+              <a:t>•  Bluhm, R., Krause, M.  (2022). Top lights: Bright cities and their
+contribution to economic development.  Journal of Development Economics , 157,
+102880.  10.1016/j.jdeveco.2022.102880  
+ La correction de saturation inverse le résultat villes primaires / secondaires
+en Afrique subsaharienne.</a:t>
+            </a:r>
+          </a:p>
+          <a:p>
+            <a:pPr>
+              <a:spcAft>
+                <a:spcPts val="700"/>
+              </a:spcAft>
+            </a:pPr>
+            <a:r>
+              <a:rPr sz="1400">
+                <a:solidFill>
+                  <a:srgbClr val="33403A"/>
+                </a:solidFill>
+                <a:latin typeface="Segoe UI"/>
+              </a:rPr>
+              <a:t>•  Min, B., Gaba, K.M., Sarr, O.F., Agalassou, A.  (2013). Detection of rural
+electrification in Africa using DMSP-OLS night lights imagery.  International
+Journal of Remote Sensing , 34(22), 8118–8141.
+ 10.1080/01431161.2013.833358  
+ Sénégal et Mali, validés contre des relevés de terrain. La référence africaine.</a:t>
+            </a:r>
+          </a:p>
+          <a:p>
+            <a:pPr>
+              <a:spcAft>
+                <a:spcPts val="700"/>
+              </a:spcAft>
+            </a:pPr>
+            <a:r>
+              <a:rPr sz="1400">
+                <a:solidFill>
+                  <a:srgbClr val="33403A"/>
+                </a:solidFill>
+                <a:latin typeface="Segoe UI"/>
+              </a:rPr>
+              <a:t>•  Elvidge, C.D., Zhizhin, M., Baugh, K., Hsu, F.-C., Ghosh, T.  (2016).
+Methods for Global Survey of Natural Gas Flaring from Visible Infrared Imaging
+Radiometer Suite Data.  Energies , 9(1), 14.
+ 10.3390/en9010014  
+ Comment les torchères sont détectées — donc comment les masquer de vos totaux.</a:t>
+            </a:r>
+          </a:p>
+        </p:txBody>
+      </p:sp>
+      <p:sp>
+        <p:nvSpPr>
+          <p:cNvPr id="6" name="TextBox 5"/>
+          <p:cNvSpPr txBox="1"/>
+          <p:nvPr/>
+        </p:nvSpPr>
+        <p:spPr>
+          <a:xfrm>
+            <a:off x="731520" y="6400800"/>
+            <a:ext cx="10728655" cy="274320"/>
+          </a:xfrm>
+          <a:prstGeom prst="rect">
+            <a:avLst/>
+          </a:prstGeom>
+          <a:noFill/>
+        </p:spPr>
+        <p:txBody>
+          <a:bodyPr wrap="square">
+            <a:spAutoFit/>
+          </a:bodyPr>
+          <a:lstStyle/>
+          <a:p>
+            <a:pPr algn="l"/>
+            <a:r>
+              <a:rPr sz="900" b="0">
+                <a:solidFill>
+                  <a:srgbClr val="6B7B75"/>
+                </a:solidFill>
+                <a:latin typeface="Segoe UI"/>
+              </a:rPr>
+              <a:t>Banque africaine de développement · UA STATAFRIC · STG17</a:t>
+            </a:r>
+          </a:p>
+        </p:txBody>
+      </p:sp>
+    </p:spTree>
+  </p:cSld>
+  <p:clrMapOvr>
+    <a:masterClrMapping/>
+  </p:clrMapOvr>
+</p:sld>
+</file>
+
+<file path=ppt/slides/slide22.xml><?xml version="1.0" encoding="utf-8"?>
+<p:sld xmlns:a="http://schemas.openxmlformats.org/drawingml/2006/main" xmlns:p="http://schemas.openxmlformats.org/presentationml/2006/main" xmlns:r="http://schemas.openxmlformats.org/officeDocument/2006/relationships">
+  <p:cSld>
+    <p:spTree>
+      <p:nvGrpSpPr>
+        <p:cNvPr id="1" name=""/>
+        <p:cNvGrpSpPr/>
+        <p:nvPr/>
+      </p:nvGrpSpPr>
+      <p:grpSpPr/>
+      <p:sp>
+        <p:nvSpPr>
+          <p:cNvPr id="2" name="Rectangle 1"/>
           <p:cNvSpPr/>
           <p:nvPr/>
         </p:nvSpPr>
         <p:spPr>
           <a:xfrm>
-            <a:off x="731520" y="4389120"/>
-            <a:ext cx="10728655" cy="960120"/>
+            <a:off x="0" y="0"/>
+            <a:ext cx="12191695" cy="6858000"/>
           </a:xfrm>
           <a:prstGeom prst="rect">
             <a:avLst/>
           </a:prstGeom>
           <a:solidFill>
-            <a:srgbClr val="F4F8F5"/>
+            <a:srgbClr val="0B2545"/>
           </a:solidFill>
           <a:ln>
-            <a:solidFill>
-              <a:srgbClr val="1B7A43"/>
-            </a:solidFill>
+            <a:noFill/>
           </a:ln>
           <a:effectLst/>
         </p:spPr>
@@ -6418,35 +6682,23 @@
           </a:fontRef>
         </p:style>
         <p:txBody>
-          <a:bodyPr rtlCol="0" anchor="ctr" wrap="square"/>
+          <a:bodyPr rtlCol="0" anchor="ctr"/>
           <a:lstStyle/>
           <a:p>
             <a:pPr algn="ctr"/>
-            <a:r>
-              <a:rPr sz="1200">
-                <a:solidFill>
-                  <a:srgbClr val="33403A"/>
-                </a:solidFill>
-                <a:latin typeface="Segoe UI"/>
-              </a:rPr>
-              <a:t>LA PROPOSITION — Non pas « la lumière égale le PIB ». Plutôt : un signal spatialement détaillé et
-fréquemment mis à jour, qui  corrèle  avec l'activité et les
-infrastructures, dont vous pouvez mesurer la relation à vos propres chiffres
-officiels — et décider ensuite de l'utiliser ou non.</a:t>
-            </a:r>
-          </a:p>
-        </p:txBody>
-      </p:sp>
-      <p:sp>
-        <p:nvSpPr>
-          <p:cNvPr id="9" name="TextBox 8"/>
+          </a:p>
+        </p:txBody>
+      </p:sp>
+      <p:sp>
+        <p:nvSpPr>
+          <p:cNvPr id="3" name="TextBox 2"/>
           <p:cNvSpPr txBox="1"/>
           <p:nvPr/>
         </p:nvSpPr>
         <p:spPr>
           <a:xfrm>
-            <a:off x="731520" y="6400800"/>
-            <a:ext cx="10728655" cy="274320"/>
+            <a:off x="1097280" y="2377440"/>
+            <a:ext cx="9997135" cy="2286000"/>
           </a:xfrm>
           <a:prstGeom prst="rect">
             <a:avLst/>
@@ -6459,15 +6711,18 @@
           </a:bodyPr>
           <a:lstStyle/>
           <a:p>
-            <a:pPr algn="l"/>
-            <a:r>
-              <a:rPr sz="900" b="0">
-                <a:solidFill>
-                  <a:srgbClr val="6B7B75"/>
-                </a:solidFill>
-                <a:latin typeface="Segoe UI"/>
-              </a:rPr>
-              <a:t>Banque africaine de développement · UA STATAFRIC · STG17</a:t>
+            <a:pPr algn="ctr"/>
+            <a:r>
+              <a:rPr sz="1400" b="0">
+                <a:solidFill>
+                  <a:srgbClr val="DBE7E0"/>
+                </a:solidFill>
+                <a:latin typeface="Segoe UI"/>
+              </a:rPr>
+              <a:t>Ce fichier PowerPoint est généré à partir du deck reveal.js
+slides/decks/08-ntl-what-darkness-tells-us.deck.html
+Les modifications faites ici ne remontent pas. Si votre changement doit être permanent,
+modifiez la source et exécutez :  python tools/build_slides.py &amp;&amp; python tools/build_pptx.py</a:t>
             </a:r>
           </a:p>
         </p:txBody>
@@ -6542,7 +6797,7 @@
         <p:spPr>
           <a:xfrm>
             <a:off x="731520" y="502920"/>
-            <a:ext cx="10728655" cy="914400"/>
+            <a:ext cx="10728655" cy="320040"/>
           </a:xfrm>
           <a:prstGeom prst="rect">
             <a:avLst/>
@@ -6557,13 +6812,13 @@
           <a:p>
             <a:pPr algn="l"/>
             <a:r>
-              <a:rPr sz="2800" b="1">
-                <a:solidFill>
-                  <a:srgbClr val="0B2545"/>
-                </a:solidFill>
-                <a:latin typeface="Segoe UI"/>
-              </a:rPr>
-              <a:t>Ce que la littérature établit réellement</a:t>
+              <a:rPr sz="1100" b="1">
+                <a:solidFill>
+                  <a:srgbClr val="1B7A43"/>
+                </a:solidFill>
+                <a:latin typeface="Segoe UI"/>
+              </a:rPr>
+              <a:t>LA PROPOSITION, ÉNONCÉE HONNÊTEMENT</a:t>
             </a:r>
           </a:p>
         </p:txBody>
@@ -6571,6 +6826,99 @@
       <p:sp>
         <p:nvSpPr>
           <p:cNvPr id="4" name="TextBox 3"/>
+          <p:cNvSpPr txBox="1"/>
+          <p:nvPr/>
+        </p:nvSpPr>
+        <p:spPr>
+          <a:xfrm>
+            <a:off x="731520" y="914400"/>
+            <a:ext cx="10728655" cy="548640"/>
+          </a:xfrm>
+          <a:prstGeom prst="rect">
+            <a:avLst/>
+          </a:prstGeom>
+          <a:noFill/>
+        </p:spPr>
+        <p:txBody>
+          <a:bodyPr wrap="square">
+            <a:spAutoFit/>
+          </a:bodyPr>
+          <a:lstStyle/>
+          <a:p>
+            <a:pPr algn="l"/>
+            <a:r>
+              <a:rPr sz="1400" b="0">
+                <a:solidFill>
+                  <a:srgbClr val="33403A"/>
+                </a:solidFill>
+                <a:latin typeface="Segoe UI"/>
+              </a:rPr>
+              <a:t>Un signal spatialement détaillé qui  corrèle  avec l'activité et les
+infrastructures — dont vous pouvez mesurer la relation à vos propres chiffres
+officiels, et décider ensuite seulement de l'utiliser.</a:t>
+            </a:r>
+          </a:p>
+        </p:txBody>
+      </p:sp>
+      <p:sp>
+        <p:nvSpPr>
+          <p:cNvPr id="5" name="Rectangle 4"/>
+          <p:cNvSpPr/>
+          <p:nvPr/>
+        </p:nvSpPr>
+        <p:spPr>
+          <a:xfrm>
+            <a:off x="731520" y="1417320"/>
+            <a:ext cx="10728655" cy="960120"/>
+          </a:xfrm>
+          <a:prstGeom prst="rect">
+            <a:avLst/>
+          </a:prstGeom>
+          <a:solidFill>
+            <a:srgbClr val="F4F8F5"/>
+          </a:solidFill>
+          <a:ln>
+            <a:solidFill>
+              <a:srgbClr val="1B7A43"/>
+            </a:solidFill>
+          </a:ln>
+          <a:effectLst/>
+        </p:spPr>
+        <p:style>
+          <a:lnRef idx="1">
+            <a:schemeClr val="accent1"/>
+          </a:lnRef>
+          <a:fillRef idx="3">
+            <a:schemeClr val="accent1"/>
+          </a:fillRef>
+          <a:effectRef idx="2">
+            <a:schemeClr val="accent1"/>
+          </a:effectRef>
+          <a:fontRef idx="minor">
+            <a:schemeClr val="lt1"/>
+          </a:fontRef>
+        </p:style>
+        <p:txBody>
+          <a:bodyPr rtlCol="0" anchor="ctr" wrap="square"/>
+          <a:lstStyle/>
+          <a:p>
+            <a:pPr algn="ctr"/>
+            <a:r>
+              <a:rPr sz="1200">
+                <a:solidFill>
+                  <a:srgbClr val="33403A"/>
+                </a:solidFill>
+                <a:latin typeface="Segoe UI"/>
+              </a:rPr>
+              <a:t>CE QUE VOUS DÉCIDEZ RÉELLEMENT AUJOURD'HUI — Non pas si les lumières nocturnes sont bonnes. Si elles sont assez bonnes,
+ dans votre pays, pour une question nommée .</a:t>
+            </a:r>
+          </a:p>
+        </p:txBody>
+      </p:sp>
+      <p:sp>
+        <p:nvSpPr>
+          <p:cNvPr id="6" name="TextBox 5"/>
           <p:cNvSpPr txBox="1"/>
           <p:nvPr/>
         </p:nvSpPr>
@@ -6630,18 +6978,17 @@
         <p:spPr>
           <a:xfrm>
             <a:off x="0" y="0"/>
-            <a:ext cx="12191695" cy="6858000"/>
+            <a:ext cx="12191695" cy="60000"/>
           </a:xfrm>
           <a:prstGeom prst="rect">
             <a:avLst/>
           </a:prstGeom>
           <a:solidFill>
-            <a:srgbClr val="0B2545"/>
+            <a:srgbClr val="F2A900"/>
           </a:solidFill>
           <a:ln>
             <a:noFill/>
           </a:ln>
-          <a:effectLst/>
         </p:spPr>
         <p:style>
           <a:lnRef idx="1">
@@ -6674,7 +7021,7 @@
         <p:spPr>
           <a:xfrm>
             <a:off x="731520" y="502920"/>
-            <a:ext cx="10728655" cy="320040"/>
+            <a:ext cx="10728655" cy="914400"/>
           </a:xfrm>
           <a:prstGeom prst="rect">
             <a:avLst/>
@@ -6689,13 +7036,13 @@
           <a:p>
             <a:pPr algn="l"/>
             <a:r>
-              <a:rPr sz="1100" b="1">
-                <a:solidFill>
-                  <a:srgbClr val="F2A900"/>
-                </a:solidFill>
-                <a:latin typeface="Segoe UI"/>
-              </a:rPr>
-              <a:t>PARTIE 1</a:t>
+              <a:rPr sz="2800" b="1">
+                <a:solidFill>
+                  <a:srgbClr val="0B2545"/>
+                </a:solidFill>
+                <a:latin typeface="Segoe UI"/>
+              </a:rPr>
+              <a:t>Ce que la littérature établit — cela fonctionne</a:t>
             </a:r>
           </a:p>
         </p:txBody>
@@ -6703,76 +7050,6 @@
       <p:sp>
         <p:nvSpPr>
           <p:cNvPr id="4" name="TextBox 3"/>
-          <p:cNvSpPr txBox="1"/>
-          <p:nvPr/>
-        </p:nvSpPr>
-        <p:spPr>
-          <a:xfrm>
-            <a:off x="731520" y="914400"/>
-            <a:ext cx="10728655" cy="914400"/>
-          </a:xfrm>
-          <a:prstGeom prst="rect">
-            <a:avLst/>
-          </a:prstGeom>
-          <a:noFill/>
-        </p:spPr>
-        <p:txBody>
-          <a:bodyPr wrap="square">
-            <a:spAutoFit/>
-          </a:bodyPr>
-          <a:lstStyle/>
-          <a:p>
-            <a:pPr algn="l"/>
-            <a:r>
-              <a:rPr sz="2800" b="1">
-                <a:solidFill>
-                  <a:srgbClr val="FFFFFF"/>
-                </a:solidFill>
-                <a:latin typeface="Segoe UI"/>
-              </a:rPr>
-              <a:t>D'où vient la donnée</a:t>
-            </a:r>
-          </a:p>
-        </p:txBody>
-      </p:sp>
-      <p:sp>
-        <p:nvSpPr>
-          <p:cNvPr id="5" name="TextBox 4"/>
-          <p:cNvSpPr txBox="1"/>
-          <p:nvPr/>
-        </p:nvSpPr>
-        <p:spPr>
-          <a:xfrm>
-            <a:off x="731520" y="1783080"/>
-            <a:ext cx="10728655" cy="548640"/>
-          </a:xfrm>
-          <a:prstGeom prst="rect">
-            <a:avLst/>
-          </a:prstGeom>
-          <a:noFill/>
-        </p:spPr>
-        <p:txBody>
-          <a:bodyPr wrap="square">
-            <a:spAutoFit/>
-          </a:bodyPr>
-          <a:lstStyle/>
-          <a:p>
-            <a:pPr algn="l"/>
-            <a:r>
-              <a:rPr sz="1400" b="0">
-                <a:solidFill>
-                  <a:srgbClr val="DBE7E0"/>
-                </a:solidFill>
-                <a:latin typeface="Segoe UI"/>
-              </a:rPr>
-              <a:t>Deux instruments, trente ans, et une discontinuité à ne pas ignorer.</a:t>
-            </a:r>
-          </a:p>
-        </p:txBody>
-      </p:sp>
-      <p:sp>
-        <p:nvSpPr>
-          <p:cNvPr id="6" name="TextBox 5"/>
           <p:cNvSpPr txBox="1"/>
           <p:nvPr/>
         </p:nvSpPr>
@@ -6896,108 +7173,14 @@
                 </a:solidFill>
                 <a:latin typeface="Segoe UI"/>
               </a:rPr>
-              <a:t>Trente ans, deux instruments</a:t>
-            </a:r>
-          </a:p>
-        </p:txBody>
-      </p:sp>
-      <p:sp>
-        <p:nvSpPr>
-          <p:cNvPr id="4" name="Rectangle 3"/>
-          <p:cNvSpPr/>
-          <p:nvPr/>
-        </p:nvSpPr>
-        <p:spPr>
-          <a:xfrm>
-            <a:off x="731520" y="1371600"/>
-            <a:ext cx="10728655" cy="960120"/>
-          </a:xfrm>
-          <a:prstGeom prst="rect">
-            <a:avLst/>
-          </a:prstGeom>
-          <a:solidFill>
-            <a:srgbClr val="F4F8F5"/>
-          </a:solidFill>
-          <a:ln>
-            <a:solidFill>
-              <a:srgbClr val="1B7A43"/>
-            </a:solidFill>
-          </a:ln>
-          <a:effectLst/>
-        </p:spPr>
-        <p:style>
-          <a:lnRef idx="1">
-            <a:schemeClr val="accent1"/>
-          </a:lnRef>
-          <a:fillRef idx="3">
-            <a:schemeClr val="accent1"/>
-          </a:fillRef>
-          <a:effectRef idx="2">
-            <a:schemeClr val="accent1"/>
-          </a:effectRef>
-          <a:fontRef idx="minor">
-            <a:schemeClr val="lt1"/>
-          </a:fontRef>
-        </p:style>
-        <p:txBody>
-          <a:bodyPr rtlCol="0" anchor="ctr" wrap="square"/>
-          <a:lstStyle/>
-          <a:p>
-            <a:pPr algn="ctr"/>
-            <a:r>
-              <a:rPr sz="1200">
-                <a:solidFill>
-                  <a:srgbClr val="33403A"/>
-                </a:solidFill>
-                <a:latin typeface="Segoe UI"/>
-              </a:rPr>
-              <a:t>LA DISCONTINUITÉ — DMSP-OLS livre un nombre numérique 6 bits non calibré ; VIIRS livre une radiance
-calibrée.  Ne raccordez jamais les deux sans harmonisation explicite  —
-et si vous harmonisez, dites quelle méthode, car elles divergent. La plupart des
-travaux africains publiés démarrent en 2012 pour exactement cette raison, et cet
-atelier aussi.</a:t>
-            </a:r>
-          </a:p>
-        </p:txBody>
-      </p:sp>
-      <p:sp>
-        <p:nvSpPr>
-          <p:cNvPr id="5" name="TextBox 4"/>
-          <p:cNvSpPr txBox="1"/>
-          <p:nvPr/>
-        </p:nvSpPr>
-        <p:spPr>
-          <a:xfrm>
-            <a:off x="731520" y="2468880"/>
-            <a:ext cx="10728655" cy="640080"/>
-          </a:xfrm>
-          <a:prstGeom prst="rect">
-            <a:avLst/>
-          </a:prstGeom>
-          <a:noFill/>
-        </p:spPr>
-        <p:txBody>
-          <a:bodyPr wrap="square">
-            <a:spAutoFit/>
-          </a:bodyPr>
-          <a:lstStyle/>
-          <a:p>
-            <a:pPr algn="l"/>
-            <a:r>
-              <a:rPr sz="1100" b="0">
-                <a:solidFill>
-                  <a:srgbClr val="6B7B75"/>
-                </a:solidFill>
-                <a:latin typeface="Segoe UI"/>
-              </a:rPr>
-              <a:t>FIGURE — capturez la diapositive 5 du deck HTML et collez-la ici.  (Les deux archives sont des instruments différents aux unités différentes. Ce n'est pas une seule série.)</a:t>
-            </a:r>
-          </a:p>
-        </p:txBody>
-      </p:sp>
-      <p:sp>
-        <p:nvSpPr>
-          <p:cNvPr id="6" name="TextBox 5"/>
+              <a:t>…et cela échoue silencieusement</a:t>
+            </a:r>
+          </a:p>
+        </p:txBody>
+      </p:sp>
+      <p:sp>
+        <p:nvSpPr>
+          <p:cNvPr id="4" name="TextBox 3"/>
           <p:cNvSpPr txBox="1"/>
           <p:nvPr/>
         </p:nvSpPr>
@@ -7057,6 +7240,208 @@
         <p:spPr>
           <a:xfrm>
             <a:off x="0" y="0"/>
+            <a:ext cx="12191695" cy="6858000"/>
+          </a:xfrm>
+          <a:prstGeom prst="rect">
+            <a:avLst/>
+          </a:prstGeom>
+          <a:solidFill>
+            <a:srgbClr val="0B2545"/>
+          </a:solidFill>
+          <a:ln>
+            <a:noFill/>
+          </a:ln>
+          <a:effectLst/>
+        </p:spPr>
+        <p:style>
+          <a:lnRef idx="1">
+            <a:schemeClr val="accent1"/>
+          </a:lnRef>
+          <a:fillRef idx="3">
+            <a:schemeClr val="accent1"/>
+          </a:fillRef>
+          <a:effectRef idx="2">
+            <a:schemeClr val="accent1"/>
+          </a:effectRef>
+          <a:fontRef idx="minor">
+            <a:schemeClr val="lt1"/>
+          </a:fontRef>
+        </p:style>
+        <p:txBody>
+          <a:bodyPr rtlCol="0" anchor="ctr"/>
+          <a:lstStyle/>
+          <a:p>
+            <a:pPr algn="ctr"/>
+          </a:p>
+        </p:txBody>
+      </p:sp>
+      <p:sp>
+        <p:nvSpPr>
+          <p:cNvPr id="3" name="TextBox 2"/>
+          <p:cNvSpPr txBox="1"/>
+          <p:nvPr/>
+        </p:nvSpPr>
+        <p:spPr>
+          <a:xfrm>
+            <a:off x="731520" y="502920"/>
+            <a:ext cx="10728655" cy="320040"/>
+          </a:xfrm>
+          <a:prstGeom prst="rect">
+            <a:avLst/>
+          </a:prstGeom>
+          <a:noFill/>
+        </p:spPr>
+        <p:txBody>
+          <a:bodyPr wrap="square">
+            <a:spAutoFit/>
+          </a:bodyPr>
+          <a:lstStyle/>
+          <a:p>
+            <a:pPr algn="l"/>
+            <a:r>
+              <a:rPr sz="1100" b="1">
+                <a:solidFill>
+                  <a:srgbClr val="F2A900"/>
+                </a:solidFill>
+                <a:latin typeface="Segoe UI"/>
+              </a:rPr>
+              <a:t>PARTIE 1</a:t>
+            </a:r>
+          </a:p>
+        </p:txBody>
+      </p:sp>
+      <p:sp>
+        <p:nvSpPr>
+          <p:cNvPr id="4" name="TextBox 3"/>
+          <p:cNvSpPr txBox="1"/>
+          <p:nvPr/>
+        </p:nvSpPr>
+        <p:spPr>
+          <a:xfrm>
+            <a:off x="731520" y="914400"/>
+            <a:ext cx="10728655" cy="914400"/>
+          </a:xfrm>
+          <a:prstGeom prst="rect">
+            <a:avLst/>
+          </a:prstGeom>
+          <a:noFill/>
+        </p:spPr>
+        <p:txBody>
+          <a:bodyPr wrap="square">
+            <a:spAutoFit/>
+          </a:bodyPr>
+          <a:lstStyle/>
+          <a:p>
+            <a:pPr algn="l"/>
+            <a:r>
+              <a:rPr sz="2800" b="1">
+                <a:solidFill>
+                  <a:srgbClr val="FFFFFF"/>
+                </a:solidFill>
+                <a:latin typeface="Segoe UI"/>
+              </a:rPr>
+              <a:t>D'où vient la donnée</a:t>
+            </a:r>
+          </a:p>
+        </p:txBody>
+      </p:sp>
+      <p:sp>
+        <p:nvSpPr>
+          <p:cNvPr id="5" name="TextBox 4"/>
+          <p:cNvSpPr txBox="1"/>
+          <p:nvPr/>
+        </p:nvSpPr>
+        <p:spPr>
+          <a:xfrm>
+            <a:off x="731520" y="1783080"/>
+            <a:ext cx="10728655" cy="548640"/>
+          </a:xfrm>
+          <a:prstGeom prst="rect">
+            <a:avLst/>
+          </a:prstGeom>
+          <a:noFill/>
+        </p:spPr>
+        <p:txBody>
+          <a:bodyPr wrap="square">
+            <a:spAutoFit/>
+          </a:bodyPr>
+          <a:lstStyle/>
+          <a:p>
+            <a:pPr algn="l"/>
+            <a:r>
+              <a:rPr sz="1400" b="0">
+                <a:solidFill>
+                  <a:srgbClr val="DBE7E0"/>
+                </a:solidFill>
+                <a:latin typeface="Segoe UI"/>
+              </a:rPr>
+              <a:t>Deux instruments, trente ans, et une discontinuité à ne pas ignorer.</a:t>
+            </a:r>
+          </a:p>
+        </p:txBody>
+      </p:sp>
+      <p:sp>
+        <p:nvSpPr>
+          <p:cNvPr id="6" name="TextBox 5"/>
+          <p:cNvSpPr txBox="1"/>
+          <p:nvPr/>
+        </p:nvSpPr>
+        <p:spPr>
+          <a:xfrm>
+            <a:off x="731520" y="6400800"/>
+            <a:ext cx="10728655" cy="274320"/>
+          </a:xfrm>
+          <a:prstGeom prst="rect">
+            <a:avLst/>
+          </a:prstGeom>
+          <a:noFill/>
+        </p:spPr>
+        <p:txBody>
+          <a:bodyPr wrap="square">
+            <a:spAutoFit/>
+          </a:bodyPr>
+          <a:lstStyle/>
+          <a:p>
+            <a:pPr algn="l"/>
+            <a:r>
+              <a:rPr sz="900" b="0">
+                <a:solidFill>
+                  <a:srgbClr val="6B7B75"/>
+                </a:solidFill>
+                <a:latin typeface="Segoe UI"/>
+              </a:rPr>
+              <a:t>Banque africaine de développement · UA STATAFRIC · STG17</a:t>
+            </a:r>
+          </a:p>
+        </p:txBody>
+      </p:sp>
+    </p:spTree>
+  </p:cSld>
+  <p:clrMapOvr>
+    <a:masterClrMapping/>
+  </p:clrMapOvr>
+</p:sld>
+</file>
+
+<file path=ppt/slides/slide7.xml><?xml version="1.0" encoding="utf-8"?>
+<p:sld xmlns:a="http://schemas.openxmlformats.org/drawingml/2006/main" xmlns:p="http://schemas.openxmlformats.org/presentationml/2006/main" xmlns:r="http://schemas.openxmlformats.org/officeDocument/2006/relationships">
+  <p:cSld>
+    <p:spTree>
+      <p:nvGrpSpPr>
+        <p:cNvPr id="1" name=""/>
+        <p:cNvGrpSpPr/>
+        <p:nvPr/>
+      </p:nvGrpSpPr>
+      <p:grpSpPr/>
+      <p:sp>
+        <p:nvSpPr>
+          <p:cNvPr id="2" name="Rectangle 1"/>
+          <p:cNvSpPr/>
+          <p:nvPr/>
+        </p:nvSpPr>
+        <p:spPr>
+          <a:xfrm>
+            <a:off x="0" y="0"/>
             <a:ext cx="12191695" cy="60000"/>
           </a:xfrm>
           <a:prstGeom prst="rect">
@@ -7121,7 +7506,7 @@
                 </a:solidFill>
                 <a:latin typeface="Segoe UI"/>
               </a:rPr>
-              <a:t>Quel produit, pour quelle question</a:t>
+              <a:t>Trente ans, deux instruments</a:t>
             </a:r>
           </a:p>
         </p:txBody>
@@ -7176,10 +7561,234 @@
                 </a:solidFill>
                 <a:latin typeface="Segoe UI"/>
               </a:rPr>
-              <a:t>DEUX CHAÎNES DÉFENDABLES, DEUX CHIFFRES DIFFÉRENTS — Le VNP46A4 de la NASA et le VNL annuel du NOAA/EOG couvrent les mêmes années avec
-un compositage et un masquage différents. Un écart de quelques pour cent entre eux
-est attendu et sain.  Publier une Somme des lumières sans nommer le produit
-et sa version n'est pas une statistique reproductible.</a:t>
+              <a:t>LA DISCONTINUITÉ — DMSP-OLS livre un nombre numérique 6 bits non calibré ; VIIRS livre une radiance
+calibrée.  Ne raccordez jamais les deux sans harmonisation explicite  —
+et si vous harmonisez, dites quelle méthode, car elles divergent. La plupart des
+travaux africains publiés démarrent en 2012 pour exactement cette raison, et cet
+atelier aussi.</a:t>
+            </a:r>
+          </a:p>
+        </p:txBody>
+      </p:sp>
+      <p:sp>
+        <p:nvSpPr>
+          <p:cNvPr id="5" name="TextBox 4"/>
+          <p:cNvSpPr txBox="1"/>
+          <p:nvPr/>
+        </p:nvSpPr>
+        <p:spPr>
+          <a:xfrm>
+            <a:off x="731520" y="2468880"/>
+            <a:ext cx="10728655" cy="640080"/>
+          </a:xfrm>
+          <a:prstGeom prst="rect">
+            <a:avLst/>
+          </a:prstGeom>
+          <a:noFill/>
+        </p:spPr>
+        <p:txBody>
+          <a:bodyPr wrap="square">
+            <a:spAutoFit/>
+          </a:bodyPr>
+          <a:lstStyle/>
+          <a:p>
+            <a:pPr algn="l"/>
+            <a:r>
+              <a:rPr sz="1100" b="0">
+                <a:solidFill>
+                  <a:srgbClr val="6B7B75"/>
+                </a:solidFill>
+                <a:latin typeface="Segoe UI"/>
+              </a:rPr>
+              <a:t>FIGURE — capturez la diapositive 7 du deck HTML et collez-la ici.  (Les deux archives sont des instruments différents aux unités différentes. Ce n'est pas une seule série.)</a:t>
+            </a:r>
+          </a:p>
+        </p:txBody>
+      </p:sp>
+      <p:sp>
+        <p:nvSpPr>
+          <p:cNvPr id="6" name="TextBox 5"/>
+          <p:cNvSpPr txBox="1"/>
+          <p:nvPr/>
+        </p:nvSpPr>
+        <p:spPr>
+          <a:xfrm>
+            <a:off x="731520" y="6400800"/>
+            <a:ext cx="10728655" cy="274320"/>
+          </a:xfrm>
+          <a:prstGeom prst="rect">
+            <a:avLst/>
+          </a:prstGeom>
+          <a:noFill/>
+        </p:spPr>
+        <p:txBody>
+          <a:bodyPr wrap="square">
+            <a:spAutoFit/>
+          </a:bodyPr>
+          <a:lstStyle/>
+          <a:p>
+            <a:pPr algn="l"/>
+            <a:r>
+              <a:rPr sz="900" b="0">
+                <a:solidFill>
+                  <a:srgbClr val="6B7B75"/>
+                </a:solidFill>
+                <a:latin typeface="Segoe UI"/>
+              </a:rPr>
+              <a:t>Banque africaine de développement · UA STATAFRIC · STG17</a:t>
+            </a:r>
+          </a:p>
+        </p:txBody>
+      </p:sp>
+    </p:spTree>
+  </p:cSld>
+  <p:clrMapOvr>
+    <a:masterClrMapping/>
+  </p:clrMapOvr>
+</p:sld>
+</file>
+
+<file path=ppt/slides/slide8.xml><?xml version="1.0" encoding="utf-8"?>
+<p:sld xmlns:a="http://schemas.openxmlformats.org/drawingml/2006/main" xmlns:p="http://schemas.openxmlformats.org/presentationml/2006/main" xmlns:r="http://schemas.openxmlformats.org/officeDocument/2006/relationships">
+  <p:cSld>
+    <p:spTree>
+      <p:nvGrpSpPr>
+        <p:cNvPr id="1" name=""/>
+        <p:cNvGrpSpPr/>
+        <p:nvPr/>
+      </p:nvGrpSpPr>
+      <p:grpSpPr/>
+      <p:sp>
+        <p:nvSpPr>
+          <p:cNvPr id="2" name="Rectangle 1"/>
+          <p:cNvSpPr/>
+          <p:nvPr/>
+        </p:nvSpPr>
+        <p:spPr>
+          <a:xfrm>
+            <a:off x="0" y="0"/>
+            <a:ext cx="12191695" cy="60000"/>
+          </a:xfrm>
+          <a:prstGeom prst="rect">
+            <a:avLst/>
+          </a:prstGeom>
+          <a:solidFill>
+            <a:srgbClr val="F2A900"/>
+          </a:solidFill>
+          <a:ln>
+            <a:noFill/>
+          </a:ln>
+        </p:spPr>
+        <p:style>
+          <a:lnRef idx="1">
+            <a:schemeClr val="accent1"/>
+          </a:lnRef>
+          <a:fillRef idx="3">
+            <a:schemeClr val="accent1"/>
+          </a:fillRef>
+          <a:effectRef idx="2">
+            <a:schemeClr val="accent1"/>
+          </a:effectRef>
+          <a:fontRef idx="minor">
+            <a:schemeClr val="lt1"/>
+          </a:fontRef>
+        </p:style>
+        <p:txBody>
+          <a:bodyPr rtlCol="0" anchor="ctr"/>
+          <a:lstStyle/>
+          <a:p>
+            <a:pPr algn="ctr"/>
+          </a:p>
+        </p:txBody>
+      </p:sp>
+      <p:sp>
+        <p:nvSpPr>
+          <p:cNvPr id="3" name="TextBox 2"/>
+          <p:cNvSpPr txBox="1"/>
+          <p:nvPr/>
+        </p:nvSpPr>
+        <p:spPr>
+          <a:xfrm>
+            <a:off x="731520" y="502920"/>
+            <a:ext cx="10728655" cy="914400"/>
+          </a:xfrm>
+          <a:prstGeom prst="rect">
+            <a:avLst/>
+          </a:prstGeom>
+          <a:noFill/>
+        </p:spPr>
+        <p:txBody>
+          <a:bodyPr wrap="square">
+            <a:spAutoFit/>
+          </a:bodyPr>
+          <a:lstStyle/>
+          <a:p>
+            <a:pPr algn="l"/>
+            <a:r>
+              <a:rPr sz="2800" b="1">
+                <a:solidFill>
+                  <a:srgbClr val="0B2545"/>
+                </a:solidFill>
+                <a:latin typeface="Segoe UI"/>
+              </a:rPr>
+              <a:t>Quel produit, pour quelle question</a:t>
+            </a:r>
+          </a:p>
+        </p:txBody>
+      </p:sp>
+      <p:sp>
+        <p:nvSpPr>
+          <p:cNvPr id="4" name="Rectangle 3"/>
+          <p:cNvSpPr/>
+          <p:nvPr/>
+        </p:nvSpPr>
+        <p:spPr>
+          <a:xfrm>
+            <a:off x="731520" y="1371600"/>
+            <a:ext cx="10728655" cy="960120"/>
+          </a:xfrm>
+          <a:prstGeom prst="rect">
+            <a:avLst/>
+          </a:prstGeom>
+          <a:solidFill>
+            <a:srgbClr val="F4F8F5"/>
+          </a:solidFill>
+          <a:ln>
+            <a:solidFill>
+              <a:srgbClr val="1B7A43"/>
+            </a:solidFill>
+          </a:ln>
+          <a:effectLst/>
+        </p:spPr>
+        <p:style>
+          <a:lnRef idx="1">
+            <a:schemeClr val="accent1"/>
+          </a:lnRef>
+          <a:fillRef idx="3">
+            <a:schemeClr val="accent1"/>
+          </a:fillRef>
+          <a:effectRef idx="2">
+            <a:schemeClr val="accent1"/>
+          </a:effectRef>
+          <a:fontRef idx="minor">
+            <a:schemeClr val="lt1"/>
+          </a:fontRef>
+        </p:style>
+        <p:txBody>
+          <a:bodyPr rtlCol="0" anchor="ctr" wrap="square"/>
+          <a:lstStyle/>
+          <a:p>
+            <a:pPr algn="ctr"/>
+            <a:r>
+              <a:rPr sz="1200">
+                <a:solidFill>
+                  <a:srgbClr val="33403A"/>
+                </a:solidFill>
+                <a:latin typeface="Segoe UI"/>
+              </a:rPr>
+              <a:t>DEUX CHAÎNES DÉFENDABLES, DEUX CHIFFRES DIFFÉRENTS — Le VNP46A4 et le VNL annuel compositent et masquent différemment. Un écart de
+quelques pour cent est attendu.  Une Somme des lumières sans produit ni
+version nommés n'est pas une statistique reproductible.</a:t>
             </a:r>
           </a:p>
         </p:txBody>
@@ -7203,10 +7812,9 @@
                 <a:tableStyleId>{5C22544A-7EE6-4342-B048-85BDC9FD1C3A}</a:tableStyleId>
               </a:tblPr>
               <a:tblGrid>
-                <a:gridCol w="2682163"/>
-                <a:gridCol w="2682163"/>
-                <a:gridCol w="2682163"/>
-                <a:gridCol w="2682166"/>
+                <a:gridCol w="3576218"/>
+                <a:gridCol w="3576218"/>
+                <a:gridCol w="3576219"/>
               </a:tblGrid>
               <a:tr h="292608">
                 <a:tc>
@@ -7222,24 +7830,6 @@
                           <a:latin typeface="Segoe UI"/>
                         </a:rPr>
                         <a:t>Produit</a:t>
-                      </a:r>
-                    </a:p>
-                  </a:txBody>
-                  <a:tcPr/>
-                </a:tc>
-                <a:tc>
-                  <a:txBody>
-                    <a:bodyPr/>
-                    <a:lstStyle/>
-                    <a:p>
-                      <a:r>
-                        <a:rPr sz="1000" b="1">
-                          <a:solidFill>
-                            <a:srgbClr val="FFFFFF"/>
-                          </a:solidFill>
-                          <a:latin typeface="Segoe UI"/>
-                        </a:rPr>
-                        <a:t>Cadence</a:t>
                       </a:r>
                     </a:p>
                   </a:txBody>
@@ -7275,7 +7865,7 @@
                           </a:solidFill>
                           <a:latin typeface="Segoe UI"/>
                         </a:rPr>
-                        <a:t>À ne pas utiliser pour</a:t>
+                        <a:t>Pas pour</a:t>
                       </a:r>
                     </a:p>
                   </a:txBody>
@@ -7295,7 +7885,7 @@
                           </a:solidFill>
                           <a:latin typeface="Segoe UI"/>
                         </a:rPr>
-                        <a:t>VNP46A2  Black Marble journalier</a:t>
+                        <a:t>VNP46A2  Black Marble, journalier</a:t>
                       </a:r>
                     </a:p>
                   </a:txBody>
@@ -7313,7 +7903,7 @@
                           </a:solidFill>
                           <a:latin typeface="Segoe UI"/>
                         </a:rPr>
-                        <a:t>Journalier</a:t>
+                        <a:t>Crise, conflit, coupures, une nuit précise</a:t>
                       </a:r>
                     </a:p>
                   </a:txBody>
@@ -7331,25 +7921,7 @@
                           </a:solidFill>
                           <a:latin typeface="Segoe UI"/>
                         </a:rPr>
-                        <a:t>Suivi de crise et de conflit ; une nuit précise ; détection de coupures</a:t>
-                      </a:r>
-                    </a:p>
-                  </a:txBody>
-                  <a:tcPr/>
-                </a:tc>
-                <a:tc>
-                  <a:txBody>
-                    <a:bodyPr/>
-                    <a:lstStyle/>
-                    <a:p>
-                      <a:r>
-                        <a:rPr sz="1000" b="0">
-                          <a:solidFill>
-                            <a:srgbClr val="33403A"/>
-                          </a:solidFill>
-                          <a:latin typeface="Segoe UI"/>
-                        </a:rPr>
-                        <a:t>Toute tendance — le bruit quotidien domine</a:t>
+                        <a:t>Toute tendance</a:t>
                       </a:r>
                     </a:p>
                   </a:txBody>
@@ -7369,7 +7941,7 @@
                           </a:solidFill>
                           <a:latin typeface="Segoe UI"/>
                         </a:rPr>
-                        <a:t>VNP46A3  Black Marble mensuel</a:t>
+                        <a:t>VNP46A3  Black Marble, mensuel</a:t>
                       </a:r>
                     </a:p>
                   </a:txBody>
@@ -7387,7 +7959,7 @@
                           </a:solidFill>
                           <a:latin typeface="Segoe UI"/>
                         </a:rPr>
-                        <a:t>Mensuel</a:t>
+                        <a:t>Saisonnalité, effets harmattan et mousson</a:t>
                       </a:r>
                     </a:p>
                   </a:txBody>
@@ -7405,25 +7977,7 @@
                           </a:solidFill>
                           <a:latin typeface="Segoe UI"/>
                         </a:rPr>
-                        <a:t>Saisonnalité ; dynamique infra-annuelle ; effets harmattan et mousson</a:t>
-                      </a:r>
-                    </a:p>
-                  </a:txBody>
-                  <a:tcPr/>
-                </a:tc>
-                <a:tc>
-                  <a:txBody>
-                    <a:bodyPr/>
-                    <a:lstStyle/>
-                    <a:p>
-                      <a:r>
-                        <a:rPr sz="1000" b="0">
-                          <a:solidFill>
-                            <a:srgbClr val="33403A"/>
-                          </a:solidFill>
-                          <a:latin typeface="Segoe UI"/>
-                        </a:rPr>
-                        <a:t>Comparer des mois différents comme s'ils étaient équivalents</a:t>
+                        <a:t>Comparer des mois dissemblables</a:t>
                       </a:r>
                     </a:p>
                   </a:txBody>
@@ -7443,25 +7997,7 @@
                           </a:solidFill>
                           <a:latin typeface="Segoe UI"/>
                         </a:rPr>
-                        <a:t>VNP46A4  Black Marble annuel</a:t>
-                      </a:r>
-                    </a:p>
-                  </a:txBody>
-                  <a:tcPr/>
-                </a:tc>
-                <a:tc>
-                  <a:txBody>
-                    <a:bodyPr/>
-                    <a:lstStyle/>
-                    <a:p>
-                      <a:r>
-                        <a:rPr sz="1000" b="0">
-                          <a:solidFill>
-                            <a:srgbClr val="33403A"/>
-                          </a:solidFill>
-                          <a:latin typeface="Segoe UI"/>
-                        </a:rPr>
-                        <a:t>Annuel</a:t>
+                        <a:t>VNP46A4  Black Marble, annuel</a:t>
                       </a:r>
                     </a:p>
                   </a:txBody>
@@ -7497,7 +8033,7 @@
                           </a:solidFill>
                           <a:latin typeface="Segoe UI"/>
                         </a:rPr>
-                        <a:t>Quoi que ce soit d'infra-annuel</a:t>
+                        <a:t>Tout ce qui est infra-annuel</a:t>
                       </a:r>
                     </a:p>
                   </a:txBody>
@@ -7535,7 +8071,7 @@
                           </a:solidFill>
                           <a:latin typeface="Segoe UI"/>
                         </a:rPr>
-                        <a:t>Annuel</a:t>
+                        <a:t>Le même travail, rien de téléchargé</a:t>
                       </a:r>
                     </a:p>
                   </a:txBody>
@@ -7553,25 +8089,7 @@
                           </a:solidFill>
                           <a:latin typeface="Segoe UI"/>
                         </a:rPr>
-                        <a:t>Le même travail sans aucun téléchargement</a:t>
-                      </a:r>
-                    </a:p>
-                  </a:txBody>
-                  <a:tcPr/>
-                </a:tc>
-                <a:tc>
-                  <a:txBody>
-                    <a:bodyPr/>
-                    <a:lstStyle/>
-                    <a:p>
-                      <a:r>
-                        <a:rPr sz="1000" b="0">
-                          <a:solidFill>
-                            <a:srgbClr val="33403A"/>
-                          </a:solidFill>
-                          <a:latin typeface="Segoe UI"/>
-                        </a:rPr>
-                        <a:t>Supposer qu'il égale le VNP46A4 — ce n'est pas le cas</a:t>
+                        <a:t>Supposer qu'il égale le VNP46A4</a:t>
                       </a:r>
                     </a:p>
                   </a:txBody>
@@ -7625,7 +8143,7 @@
 </p:sld>
 </file>
 
-<file path=ppt/slides/slide7.xml><?xml version="1.0" encoding="utf-8"?>
+<file path=ppt/slides/slide9.xml><?xml version="1.0" encoding="utf-8"?>
 <p:sld xmlns:a="http://schemas.openxmlformats.org/drawingml/2006/main" xmlns:p="http://schemas.openxmlformats.org/presentationml/2006/main" xmlns:r="http://schemas.openxmlformats.org/officeDocument/2006/relationships">
   <p:cSld>
     <p:spTree>
@@ -7708,81 +8226,21 @@
                 </a:solidFill>
                 <a:latin typeface="Segoe UI"/>
               </a:rPr>
-              <a:t>Où l'obtenir concrètement — quatre voies, toutes gratuites</a:t>
-            </a:r>
-          </a:p>
-        </p:txBody>
-      </p:sp>
-      <p:sp>
-        <p:nvSpPr>
-          <p:cNvPr id="4" name="Rectangle 3"/>
-          <p:cNvSpPr/>
-          <p:nvPr/>
-        </p:nvSpPr>
-        <p:spPr>
-          <a:xfrm>
-            <a:off x="731520" y="1371600"/>
-            <a:ext cx="10728655" cy="960120"/>
-          </a:xfrm>
-          <a:prstGeom prst="rect">
-            <a:avLst/>
-          </a:prstGeom>
-          <a:solidFill>
-            <a:srgbClr val="F4F8F5"/>
-          </a:solidFill>
-          <a:ln>
-            <a:solidFill>
-              <a:srgbClr val="1B7A43"/>
-            </a:solidFill>
-          </a:ln>
-          <a:effectLst/>
-        </p:spPr>
-        <p:style>
-          <a:lnRef idx="1">
-            <a:schemeClr val="accent1"/>
-          </a:lnRef>
-          <a:fillRef idx="3">
-            <a:schemeClr val="accent1"/>
-          </a:fillRef>
-          <a:effectRef idx="2">
-            <a:schemeClr val="accent1"/>
-          </a:effectRef>
-          <a:fontRef idx="minor">
-            <a:schemeClr val="lt1"/>
-          </a:fontRef>
-        </p:style>
-        <p:txBody>
-          <a:bodyPr rtlCol="0" anchor="ctr" wrap="square"/>
-          <a:lstStyle/>
-          <a:p>
-            <a:pPr algn="ctr"/>
-            <a:r>
-              <a:rPr sz="1200">
-                <a:solidFill>
-                  <a:srgbClr val="33403A"/>
-                </a:solidFill>
-                <a:latin typeface="Segoe UI"/>
-              </a:rPr>
-              <a:t>GRATUIT À OBTENIR N'EST PAS LIBRE D'USAGE — Black Marble et le VNL sont des produits du gouvernement américain, de fait dans
-le domaine public : un indicateur national dérivé peut donc porter la licence
-ouverte de votre office. Ce n'est  pas  vrai de toutes les sources de la
-semaine — les données Ookla de mercredi sont en CC BY-NC-SA 4.0, et le « pas
-d'usage commercial » comme le « partage à l'identique » se propagent à tout ce que
-vous en dérivez.</a:t>
+              <a:t>Quatre voies vers la donnée, toutes gratuites</a:t>
             </a:r>
           </a:p>
         </p:txBody>
       </p:sp>
       <p:graphicFrame>
         <p:nvGraphicFramePr>
-          <p:cNvPr id="5" name="Table 4"/>
+          <p:cNvPr id="4" name="Table 3"/>
           <p:cNvGraphicFramePr>
             <a:graphicFrameLocks noGrp="1"/>
           </p:cNvGraphicFramePr>
           <p:nvPr/>
         </p:nvGraphicFramePr>
         <p:xfrm>
-          <a:off x="731520" y="2468880"/>
+          <a:off x="731520" y="1371600"/>
           <a:ext cx="10728655" cy="1463040"/>
         </p:xfrm>
         <a:graphic>
@@ -7792,10 +8250,9 @@
                 <a:tableStyleId>{5C22544A-7EE6-4342-B048-85BDC9FD1C3A}</a:tableStyleId>
               </a:tblPr>
               <a:tblGrid>
-                <a:gridCol w="2682163"/>
-                <a:gridCol w="2682163"/>
-                <a:gridCol w="2682163"/>
-                <a:gridCol w="2682166"/>
+                <a:gridCol w="3576218"/>
+                <a:gridCol w="3576218"/>
+                <a:gridCol w="3576219"/>
               </a:tblGrid>
               <a:tr h="292608">
                 <a:tc>
@@ -7811,24 +8268,6 @@
                           <a:latin typeface="Segoe UI"/>
                         </a:rPr>
                         <a:t>Voie</a:t>
-                      </a:r>
-                    </a:p>
-                  </a:txBody>
-                  <a:tcPr/>
-                </a:tc>
-                <a:tc>
-                  <a:txBody>
-                    <a:bodyPr/>
-                    <a:lstStyle/>
-                    <a:p>
-                      <a:r>
-                        <a:rPr sz="1000" b="1">
-                          <a:solidFill>
-                            <a:srgbClr val="FFFFFF"/>
-                          </a:solidFill>
-                          <a:latin typeface="Segoe UI"/>
-                        </a:rPr>
-                        <a:t>Ce qu'elle donne</a:t>
                       </a:r>
                     </a:p>
                   </a:txBody>
@@ -7864,7 +8303,7 @@
                           </a:solidFill>
                           <a:latin typeface="Segoe UI"/>
                         </a:rPr>
-                        <a:t>Quand la préférer</a:t>
+                        <a:t>La prendre quand</a:t>
                       </a:r>
                     </a:p>
                   </a:txBody>
@@ -7902,7 +8341,7 @@
                           </a:solidFill>
                           <a:latin typeface="Segoe UI"/>
                         </a:rPr>
-                        <a:t>Black Marble VNP46A1-A4, la source faisant autorité</a:t>
+                        <a:t>Compte Earthdata + jeton</a:t>
                       </a:r>
                     </a:p>
                   </a:txBody>
@@ -7920,25 +8359,7 @@
                           </a:solidFill>
                           <a:latin typeface="Segoe UI"/>
                         </a:rPr>
-                        <a:t>Compte Earthdata gratuit + jeton porteur</a:t>
-                      </a:r>
-                    </a:p>
-                  </a:txBody>
-                  <a:tcPr/>
-                </a:tc>
-                <a:tc>
-                  <a:txBody>
-                    <a:bodyPr/>
-                    <a:lstStyle/>
-                    <a:p>
-                      <a:r>
-                        <a:rPr sz="1000" b="0">
-                          <a:solidFill>
-                            <a:srgbClr val="33403A"/>
-                          </a:solidFill>
-                          <a:latin typeface="Segoe UI"/>
-                        </a:rPr>
-                        <a:t>Vous voulez le produit de référence et pouvez assumer le téléchargement</a:t>
+                        <a:t>Vous voulez le produit de référence</a:t>
                       </a:r>
                     </a:p>
                   </a:txBody>
@@ -7976,24 +8397,6 @@
                           </a:solidFill>
                           <a:latin typeface="Segoe UI"/>
                         </a:rPr>
-                        <a:t>VNL annuel EOG v2, et le relevé des torchères</a:t>
-                      </a:r>
-                    </a:p>
-                  </a:txBody>
-                  <a:tcPr/>
-                </a:tc>
-                <a:tc>
-                  <a:txBody>
-                    <a:bodyPr/>
-                    <a:lstStyle/>
-                    <a:p>
-                      <a:r>
-                        <a:rPr sz="1000" b="0">
-                          <a:solidFill>
-                            <a:srgbClr val="33403A"/>
-                          </a:solidFill>
-                          <a:latin typeface="Segoe UI"/>
-                        </a:rPr>
                         <a:t>Inscription gratuite</a:t>
                       </a:r>
                     </a:p>
@@ -8012,7 +8415,7 @@
                           </a:solidFill>
                           <a:latin typeface="Segoe UI"/>
                         </a:rPr>
-                        <a:t>Vous voulez une série annuelle prête à l'emploi, ou un masque de torchères</a:t>
+                        <a:t>Vous voulez la série annuelle, ou un masque de torchères</a:t>
                       </a:r>
                     </a:p>
                   </a:txBody>
@@ -8050,7 +8453,7 @@
                           </a:solidFill>
                           <a:latin typeface="Segoe UI"/>
                         </a:rPr>
-                        <a:t>La même série, calculée côté serveur</a:t>
+                        <a:t>Compte gratuit + projet Cloud</a:t>
                       </a:r>
                     </a:p>
                   </a:txBody>
@@ -8068,25 +8471,7 @@
                           </a:solidFill>
                           <a:latin typeface="Segoe UI"/>
                         </a:rPr>
-                        <a:t>Compte non commercial gratuit + projet Cloud</a:t>
-                      </a:r>
-                    </a:p>
-                  </a:txBody>
-                  <a:tcPr/>
-                </a:tc>
-                <a:tc>
-                  <a:txBody>
-                    <a:bodyPr/>
-                    <a:lstStyle/>
-                    <a:p>
-                      <a:r>
-                        <a:rPr sz="1000" b="0">
-                          <a:solidFill>
-                            <a:srgbClr val="33403A"/>
-                          </a:solidFill>
-                          <a:latin typeface="Segoe UI"/>
-                        </a:rPr>
-                        <a:t>La bande passante est votre contrainte  — rien n'est téléchargé</a:t>
+                        <a:t>La bande passante est votre contrainte</a:t>
                       </a:r>
                     </a:p>
                   </a:txBody>
@@ -8124,7 +8509,7 @@
                           </a:solidFill>
                           <a:latin typeface="Segoe UI"/>
                         </a:rPr>
-                        <a:t>L'archive nocturne complète depuis 1992, prête à l'analyse</a:t>
+                        <a:t>Rien du tout</a:t>
                       </a:r>
                     </a:p>
                   </a:txBody>
@@ -8142,25 +8527,7 @@
                           </a:solidFill>
                           <a:latin typeface="Segoe UI"/>
                         </a:rPr>
-                        <a:t>Rien — aucun compte</a:t>
-                      </a:r>
-                    </a:p>
-                  </a:txBody>
-                  <a:tcPr/>
-                </a:tc>
-                <a:tc>
-                  <a:txBody>
-                    <a:bodyPr/>
-                    <a:lstStyle/>
-                    <a:p>
-                      <a:r>
-                        <a:rPr sz="1000" b="0">
-                          <a:solidFill>
-                            <a:srgbClr val="33403A"/>
-                          </a:solidFill>
-                          <a:latin typeface="Segoe UI"/>
-                        </a:rPr>
-                        <a:t>Vous avez besoin des années DMSP, ou d'une chaîne sans authentification</a:t>
+                        <a:t>Il vous faut les années DMSP, ou aucune authentification</a:t>
                       </a:r>
                     </a:p>
                   </a:txBody>
@@ -8171,374 +8538,6 @@
           </a:graphicData>
         </a:graphic>
       </p:graphicFrame>
-      <p:sp>
-        <p:nvSpPr>
-          <p:cNvPr id="6" name="TextBox 5"/>
-          <p:cNvSpPr txBox="1"/>
-          <p:nvPr/>
-        </p:nvSpPr>
-        <p:spPr>
-          <a:xfrm>
-            <a:off x="731520" y="6400800"/>
-            <a:ext cx="10728655" cy="274320"/>
-          </a:xfrm>
-          <a:prstGeom prst="rect">
-            <a:avLst/>
-          </a:prstGeom>
-          <a:noFill/>
-        </p:spPr>
-        <p:txBody>
-          <a:bodyPr wrap="square">
-            <a:spAutoFit/>
-          </a:bodyPr>
-          <a:lstStyle/>
-          <a:p>
-            <a:pPr algn="l"/>
-            <a:r>
-              <a:rPr sz="900" b="0">
-                <a:solidFill>
-                  <a:srgbClr val="6B7B75"/>
-                </a:solidFill>
-                <a:latin typeface="Segoe UI"/>
-              </a:rPr>
-              <a:t>Banque africaine de développement · UA STATAFRIC · STG17</a:t>
-            </a:r>
-          </a:p>
-        </p:txBody>
-      </p:sp>
-    </p:spTree>
-  </p:cSld>
-  <p:clrMapOvr>
-    <a:masterClrMapping/>
-  </p:clrMapOvr>
-</p:sld>
-</file>
-
-<file path=ppt/slides/slide8.xml><?xml version="1.0" encoding="utf-8"?>
-<p:sld xmlns:a="http://schemas.openxmlformats.org/drawingml/2006/main" xmlns:p="http://schemas.openxmlformats.org/presentationml/2006/main" xmlns:r="http://schemas.openxmlformats.org/officeDocument/2006/relationships">
-  <p:cSld>
-    <p:spTree>
-      <p:nvGrpSpPr>
-        <p:cNvPr id="1" name=""/>
-        <p:cNvGrpSpPr/>
-        <p:nvPr/>
-      </p:nvGrpSpPr>
-      <p:grpSpPr/>
-      <p:sp>
-        <p:nvSpPr>
-          <p:cNvPr id="2" name="Rectangle 1"/>
-          <p:cNvSpPr/>
-          <p:nvPr/>
-        </p:nvSpPr>
-        <p:spPr>
-          <a:xfrm>
-            <a:off x="0" y="0"/>
-            <a:ext cx="12191695" cy="6858000"/>
-          </a:xfrm>
-          <a:prstGeom prst="rect">
-            <a:avLst/>
-          </a:prstGeom>
-          <a:solidFill>
-            <a:srgbClr val="0B2545"/>
-          </a:solidFill>
-          <a:ln>
-            <a:noFill/>
-          </a:ln>
-          <a:effectLst/>
-        </p:spPr>
-        <p:style>
-          <a:lnRef idx="1">
-            <a:schemeClr val="accent1"/>
-          </a:lnRef>
-          <a:fillRef idx="3">
-            <a:schemeClr val="accent1"/>
-          </a:fillRef>
-          <a:effectRef idx="2">
-            <a:schemeClr val="accent1"/>
-          </a:effectRef>
-          <a:fontRef idx="minor">
-            <a:schemeClr val="lt1"/>
-          </a:fontRef>
-        </p:style>
-        <p:txBody>
-          <a:bodyPr rtlCol="0" anchor="ctr"/>
-          <a:lstStyle/>
-          <a:p>
-            <a:pPr algn="ctr"/>
-          </a:p>
-        </p:txBody>
-      </p:sp>
-      <p:sp>
-        <p:nvSpPr>
-          <p:cNvPr id="3" name="TextBox 2"/>
-          <p:cNvSpPr txBox="1"/>
-          <p:nvPr/>
-        </p:nvSpPr>
-        <p:spPr>
-          <a:xfrm>
-            <a:off x="731520" y="502920"/>
-            <a:ext cx="10728655" cy="320040"/>
-          </a:xfrm>
-          <a:prstGeom prst="rect">
-            <a:avLst/>
-          </a:prstGeom>
-          <a:noFill/>
-        </p:spPr>
-        <p:txBody>
-          <a:bodyPr wrap="square">
-            <a:spAutoFit/>
-          </a:bodyPr>
-          <a:lstStyle/>
-          <a:p>
-            <a:pPr algn="l"/>
-            <a:r>
-              <a:rPr sz="1100" b="1">
-                <a:solidFill>
-                  <a:srgbClr val="F2A900"/>
-                </a:solidFill>
-                <a:latin typeface="Segoe UI"/>
-              </a:rPr>
-              <a:t>PARTIE 2</a:t>
-            </a:r>
-          </a:p>
-        </p:txBody>
-      </p:sp>
-      <p:sp>
-        <p:nvSpPr>
-          <p:cNvPr id="4" name="TextBox 3"/>
-          <p:cNvSpPr txBox="1"/>
-          <p:nvPr/>
-        </p:nvSpPr>
-        <p:spPr>
-          <a:xfrm>
-            <a:off x="731520" y="914400"/>
-            <a:ext cx="10728655" cy="914400"/>
-          </a:xfrm>
-          <a:prstGeom prst="rect">
-            <a:avLst/>
-          </a:prstGeom>
-          <a:noFill/>
-        </p:spPr>
-        <p:txBody>
-          <a:bodyPr wrap="square">
-            <a:spAutoFit/>
-          </a:bodyPr>
-          <a:lstStyle/>
-          <a:p>
-            <a:pPr algn="l"/>
-            <a:r>
-              <a:rPr sz="2800" b="1">
-                <a:solidFill>
-                  <a:srgbClr val="FFFFFF"/>
-                </a:solidFill>
-                <a:latin typeface="Segoe UI"/>
-              </a:rPr>
-              <a:t>De la radiance à un indicateur</a:t>
-            </a:r>
-          </a:p>
-        </p:txBody>
-      </p:sp>
-      <p:sp>
-        <p:nvSpPr>
-          <p:cNvPr id="5" name="TextBox 4"/>
-          <p:cNvSpPr txBox="1"/>
-          <p:nvPr/>
-        </p:nvSpPr>
-        <p:spPr>
-          <a:xfrm>
-            <a:off x="731520" y="1783080"/>
-            <a:ext cx="10728655" cy="548640"/>
-          </a:xfrm>
-          <a:prstGeom prst="rect">
-            <a:avLst/>
-          </a:prstGeom>
-          <a:noFill/>
-        </p:spPr>
-        <p:txBody>
-          <a:bodyPr wrap="square">
-            <a:spAutoFit/>
-          </a:bodyPr>
-          <a:lstStyle/>
-          <a:p>
-            <a:pPr algn="l"/>
-            <a:r>
-              <a:rPr sz="1400" b="0">
-                <a:solidFill>
-                  <a:srgbClr val="DBE7E0"/>
-                </a:solidFill>
-                <a:latin typeface="Segoe UI"/>
-              </a:rPr>
-              <a:t>Les cinq étapes que vous exécuterez ce matin et cet après-midi.</a:t>
-            </a:r>
-          </a:p>
-        </p:txBody>
-      </p:sp>
-      <p:sp>
-        <p:nvSpPr>
-          <p:cNvPr id="6" name="TextBox 5"/>
-          <p:cNvSpPr txBox="1"/>
-          <p:nvPr/>
-        </p:nvSpPr>
-        <p:spPr>
-          <a:xfrm>
-            <a:off x="731520" y="6400800"/>
-            <a:ext cx="10728655" cy="274320"/>
-          </a:xfrm>
-          <a:prstGeom prst="rect">
-            <a:avLst/>
-          </a:prstGeom>
-          <a:noFill/>
-        </p:spPr>
-        <p:txBody>
-          <a:bodyPr wrap="square">
-            <a:spAutoFit/>
-          </a:bodyPr>
-          <a:lstStyle/>
-          <a:p>
-            <a:pPr algn="l"/>
-            <a:r>
-              <a:rPr sz="900" b="0">
-                <a:solidFill>
-                  <a:srgbClr val="6B7B75"/>
-                </a:solidFill>
-                <a:latin typeface="Segoe UI"/>
-              </a:rPr>
-              <a:t>Banque africaine de développement · UA STATAFRIC · STG17</a:t>
-            </a:r>
-          </a:p>
-        </p:txBody>
-      </p:sp>
-    </p:spTree>
-  </p:cSld>
-  <p:clrMapOvr>
-    <a:masterClrMapping/>
-  </p:clrMapOvr>
-</p:sld>
-</file>
-
-<file path=ppt/slides/slide9.xml><?xml version="1.0" encoding="utf-8"?>
-<p:sld xmlns:a="http://schemas.openxmlformats.org/drawingml/2006/main" xmlns:p="http://schemas.openxmlformats.org/presentationml/2006/main" xmlns:r="http://schemas.openxmlformats.org/officeDocument/2006/relationships">
-  <p:cSld>
-    <p:spTree>
-      <p:nvGrpSpPr>
-        <p:cNvPr id="1" name=""/>
-        <p:cNvGrpSpPr/>
-        <p:nvPr/>
-      </p:nvGrpSpPr>
-      <p:grpSpPr/>
-      <p:sp>
-        <p:nvSpPr>
-          <p:cNvPr id="2" name="Rectangle 1"/>
-          <p:cNvSpPr/>
-          <p:nvPr/>
-        </p:nvSpPr>
-        <p:spPr>
-          <a:xfrm>
-            <a:off x="0" y="0"/>
-            <a:ext cx="12191695" cy="60000"/>
-          </a:xfrm>
-          <a:prstGeom prst="rect">
-            <a:avLst/>
-          </a:prstGeom>
-          <a:solidFill>
-            <a:srgbClr val="F2A900"/>
-          </a:solidFill>
-          <a:ln>
-            <a:noFill/>
-          </a:ln>
-        </p:spPr>
-        <p:style>
-          <a:lnRef idx="1">
-            <a:schemeClr val="accent1"/>
-          </a:lnRef>
-          <a:fillRef idx="3">
-            <a:schemeClr val="accent1"/>
-          </a:fillRef>
-          <a:effectRef idx="2">
-            <a:schemeClr val="accent1"/>
-          </a:effectRef>
-          <a:fontRef idx="minor">
-            <a:schemeClr val="lt1"/>
-          </a:fontRef>
-        </p:style>
-        <p:txBody>
-          <a:bodyPr rtlCol="0" anchor="ctr"/>
-          <a:lstStyle/>
-          <a:p>
-            <a:pPr algn="ctr"/>
-          </a:p>
-        </p:txBody>
-      </p:sp>
-      <p:sp>
-        <p:nvSpPr>
-          <p:cNvPr id="3" name="TextBox 2"/>
-          <p:cNvSpPr txBox="1"/>
-          <p:nvPr/>
-        </p:nvSpPr>
-        <p:spPr>
-          <a:xfrm>
-            <a:off x="731520" y="502920"/>
-            <a:ext cx="10728655" cy="914400"/>
-          </a:xfrm>
-          <a:prstGeom prst="rect">
-            <a:avLst/>
-          </a:prstGeom>
-          <a:noFill/>
-        </p:spPr>
-        <p:txBody>
-          <a:bodyPr wrap="square">
-            <a:spAutoFit/>
-          </a:bodyPr>
-          <a:lstStyle/>
-          <a:p>
-            <a:pPr algn="l"/>
-            <a:r>
-              <a:rPr sz="2800" b="1">
-                <a:solidFill>
-                  <a:srgbClr val="0B2545"/>
-                </a:solidFill>
-                <a:latin typeface="Segoe UI"/>
-              </a:rPr>
-              <a:t>La chaîne, de bout en bout</a:t>
-            </a:r>
-          </a:p>
-        </p:txBody>
-      </p:sp>
-      <p:sp>
-        <p:nvSpPr>
-          <p:cNvPr id="4" name="TextBox 3"/>
-          <p:cNvSpPr txBox="1"/>
-          <p:nvPr/>
-        </p:nvSpPr>
-        <p:spPr>
-          <a:xfrm>
-            <a:off x="731520" y="1371600"/>
-            <a:ext cx="10728655" cy="640080"/>
-          </a:xfrm>
-          <a:prstGeom prst="rect">
-            <a:avLst/>
-          </a:prstGeom>
-          <a:noFill/>
-        </p:spPr>
-        <p:txBody>
-          <a:bodyPr wrap="square">
-            <a:spAutoFit/>
-          </a:bodyPr>
-          <a:lstStyle/>
-          <a:p>
-            <a:pPr algn="l"/>
-            <a:r>
-              <a:rPr sz="1100" b="0">
-                <a:solidFill>
-                  <a:srgbClr val="6B7B75"/>
-                </a:solidFill>
-                <a:latin typeface="Segoe UI"/>
-              </a:rPr>
-              <a:t>FIGURE — capturez la diapositive 9 du deck HTML et collez-la ici.  (L'étape 5 n'est pas une formalité. C'est elle qui décide si votre pays peut diffuser ceci.)</a:t>
-            </a:r>
-          </a:p>
-        </p:txBody>
-      </p:sp>
       <p:sp>
         <p:nvSpPr>
           <p:cNvPr id="5" name="TextBox 4"/>

--- a/docs/slides/pptx/08-ntl-what-darkness-tells-us-fr.pptx
+++ b/docs/slides/pptx/08-ntl-what-darkness-tells-us-fr.pptx
@@ -3759,119 +3759,13 @@
       </p:sp>
       <p:sp>
         <p:nvSpPr>
-          <p:cNvPr id="4" name="TextBox 3"/>
-          <p:cNvSpPr txBox="1"/>
+          <p:cNvPr id="4" name="Rectangle 3"/>
+          <p:cNvSpPr/>
           <p:nvPr/>
         </p:nvSpPr>
         <p:spPr>
           <a:xfrm>
             <a:off x="731520" y="1371600"/>
-            <a:ext cx="10728655" cy="548640"/>
-          </a:xfrm>
-          <a:prstGeom prst="rect">
-            <a:avLst/>
-          </a:prstGeom>
-          <a:noFill/>
-        </p:spPr>
-        <p:txBody>
-          <a:bodyPr wrap="square">
-            <a:spAutoFit/>
-          </a:bodyPr>
-          <a:lstStyle/>
-          <a:p>
-            <a:pPr algn="l"/>
-            <a:r>
-              <a:rPr sz="1400" b="0">
-                <a:solidFill>
-                  <a:srgbClr val="33403A"/>
-                </a:solidFill>
-                <a:latin typeface="Segoe UI"/>
-              </a:rPr>
-              <a:t>Radiance totale sur une zone.</a:t>
-            </a:r>
-          </a:p>
-        </p:txBody>
-      </p:sp>
-      <p:sp>
-        <p:nvSpPr>
-          <p:cNvPr id="5" name="TextBox 4"/>
-          <p:cNvSpPr txBox="1"/>
-          <p:nvPr/>
-        </p:nvSpPr>
-        <p:spPr>
-          <a:xfrm>
-            <a:off x="731520" y="1874520"/>
-            <a:ext cx="10728655" cy="548640"/>
-          </a:xfrm>
-          <a:prstGeom prst="rect">
-            <a:avLst/>
-          </a:prstGeom>
-          <a:noFill/>
-        </p:spPr>
-        <p:txBody>
-          <a:bodyPr wrap="square">
-            <a:spAutoFit/>
-          </a:bodyPr>
-          <a:lstStyle/>
-          <a:p>
-            <a:pPr algn="l"/>
-            <a:r>
-              <a:rPr sz="1400" b="0">
-                <a:solidFill>
-                  <a:srgbClr val="33403A"/>
-                </a:solidFill>
-                <a:latin typeface="Segoe UI"/>
-              </a:rPr>
-              <a:t>Quelle quantité d'activité
-éclairée ?  Dominée par les villes.</a:t>
-            </a:r>
-          </a:p>
-        </p:txBody>
-      </p:sp>
-      <p:sp>
-        <p:nvSpPr>
-          <p:cNvPr id="6" name="TextBox 5"/>
-          <p:cNvSpPr txBox="1"/>
-          <p:nvPr/>
-        </p:nvSpPr>
-        <p:spPr>
-          <a:xfrm>
-            <a:off x="731520" y="2377440"/>
-            <a:ext cx="10728655" cy="548640"/>
-          </a:xfrm>
-          <a:prstGeom prst="rect">
-            <a:avLst/>
-          </a:prstGeom>
-          <a:noFill/>
-        </p:spPr>
-        <p:txBody>
-          <a:bodyPr wrap="square">
-            <a:spAutoFit/>
-          </a:bodyPr>
-          <a:lstStyle/>
-          <a:p>
-            <a:pPr algn="l"/>
-            <a:r>
-              <a:rPr sz="1400" b="0">
-                <a:solidFill>
-                  <a:srgbClr val="33403A"/>
-                </a:solidFill>
-                <a:latin typeface="Segoe UI"/>
-              </a:rPr>
-              <a:t>Part du territoire au-dessus d'un seuil.</a:t>
-            </a:r>
-          </a:p>
-        </p:txBody>
-      </p:sp>
-      <p:sp>
-        <p:nvSpPr>
-          <p:cNvPr id="7" name="Rectangle 6"/>
-          <p:cNvSpPr/>
-          <p:nvPr/>
-        </p:nvSpPr>
-        <p:spPr>
-          <a:xfrm>
-            <a:off x="731520" y="2880360"/>
             <a:ext cx="10728655" cy="960120"/>
           </a:xfrm>
           <a:prstGeom prst="rect">
@@ -3921,7 +3815,7 @@
       </p:sp>
       <p:sp>
         <p:nvSpPr>
-          <p:cNvPr id="8" name="TextBox 7"/>
+          <p:cNvPr id="5" name="TextBox 4"/>
           <p:cNvSpPr txBox="1"/>
           <p:nvPr/>
         </p:nvSpPr>
@@ -5169,7 +5063,7 @@
                 </a:solidFill>
                 <a:latin typeface="Segoe UI"/>
               </a:rPr>
-              <a:t>•  Progrès de l'électrification</a:t>
+              <a:t>•  Le PIB en niveau</a:t>
             </a:r>
           </a:p>
           <a:p>
@@ -5185,7 +5079,7 @@
                 </a:solidFill>
                 <a:latin typeface="Segoe UI"/>
               </a:rPr>
-              <a:t>•  Urbanisation et croissance des localités</a:t>
+              <a:t>•  Le taux de raccordement des ménages</a:t>
             </a:r>
           </a:p>
           <a:p>
@@ -5201,7 +5095,7 @@
                 </a:solidFill>
                 <a:latin typeface="Segoe UI"/>
               </a:rPr>
-              <a:t>•  Impact des crises et des conflits</a:t>
+              <a:t>•  L'activité informelle de jour</a:t>
             </a:r>
           </a:p>
           <a:p>
@@ -5217,7 +5111,7 @@
                 </a:solidFill>
                 <a:latin typeface="Segoe UI"/>
               </a:rPr>
-              <a:t>•  Inégalité spatiale des infrastructures</a:t>
+              <a:t>•  Toute analyse à l'échelle du village</a:t>
             </a:r>
           </a:p>
           <a:p>
@@ -5233,7 +5127,7 @@
                 </a:solidFill>
                 <a:latin typeface="Segoe UI"/>
               </a:rPr>
-              <a:t>•  Comparaison entre districts , même année</a:t>
+              <a:t>•  Les niveaux entre pays</a:t>
             </a:r>
           </a:p>
           <a:p>
@@ -5249,7 +5143,7 @@
                 </a:solidFill>
                 <a:latin typeface="Segoe UI"/>
               </a:rPr>
-              <a:t>•  Le PIB en niveau</a:t>
+              <a:t>•  Progrès de l'électrification</a:t>
             </a:r>
           </a:p>
           <a:p>
@@ -5265,7 +5159,7 @@
                 </a:solidFill>
                 <a:latin typeface="Segoe UI"/>
               </a:rPr>
-              <a:t>•  Le taux de raccordement des ménages</a:t>
+              <a:t>•  Urbanisation et croissance des localités</a:t>
             </a:r>
           </a:p>
           <a:p>
@@ -5281,7 +5175,7 @@
                 </a:solidFill>
                 <a:latin typeface="Segoe UI"/>
               </a:rPr>
-              <a:t>•  L'activité informelle de jour</a:t>
+              <a:t>•  Impact des crises et des conflits</a:t>
             </a:r>
           </a:p>
           <a:p>
@@ -5297,7 +5191,7 @@
                 </a:solidFill>
                 <a:latin typeface="Segoe UI"/>
               </a:rPr>
-              <a:t>•  Toute analyse à l'échelle du village</a:t>
+              <a:t>•  Inégalité spatiale des infrastructures</a:t>
             </a:r>
           </a:p>
         </p:txBody>
